--- a/Agent365-Overview.pptx
+++ b/Agent365-Overview.pptx
@@ -20,9 +20,13 @@
     <p:sldId id="268" r:id="rId14"/>
     <p:sldId id="269" r:id="rId15"/>
     <p:sldId id="270" r:id="rId16"/>
+    <p:sldId id="271" r:id="rId17"/>
+    <p:sldId id="272" r:id="rId18"/>
+    <p:sldId id="273" r:id="rId19"/>
+    <p:sldId id="274" r:id="rId20"/>
   </p:sldIdLst>
   <p:notesMasterIdLst>
-    <p:notesMasterId r:id="rId17"/>
+    <p:notesMasterId r:id="rId21"/>
   </p:notesMasterIdLst>
   <p:sldSz cx="9144000" cy="5143500"/>
   <p:notesSz cx="5143500" cy="9144000"/>
@@ -121,14 +125,14 @@
   <p:extLst>
     <p:ext uri="{521415D9-36F7-43E2-AB2F-B90AF26B5E84}">
       <p14:sectionLst xmlns:p14="http://schemas.microsoft.com/office/powerpoint/2010/main">
-        <p14:section name="Introduction" id="{b6813e60-1f0b-56cf-e2a2-9efbc724328f}">
+        <p14:section name="Introduction" id="{32913bae-b68a-e539-4414-37d92c4aa2e7}">
           <p14:sldIdLst>
             <p14:sldId id="256"/>
             <p14:sldId id="257"/>
             <p14:sldId id="258"/>
           </p14:sldIdLst>
         </p14:section>
-        <p14:section name="Capabilities" id="{77b3a711-ef68-7aa6-5a9d-be8e9be2600a}">
+        <p14:section name="Capabilities" id="{441698c3-9f10-c853-7db4-3b1fe3bf7a09}">
           <p14:sldIdLst>
             <p14:sldId id="259"/>
             <p14:sldId id="260"/>
@@ -141,11 +145,19 @@
             <p14:sldId id="267"/>
           </p14:sldIdLst>
         </p14:section>
-        <p14:section name="Plan" id="{51c97190-ff94-3edb-2967-39386d519d4e}">
+        <p14:section name="Blueprints" id="{b73a6de2-f46b-574c-31a2-7b8564d7a059}">
           <p14:sldIdLst>
             <p14:sldId id="268"/>
             <p14:sldId id="269"/>
             <p14:sldId id="270"/>
+            <p14:sldId id="271"/>
+          </p14:sldIdLst>
+        </p14:section>
+        <p14:section name="Plan" id="{0728e4d1-7097-c98d-86b8-9bf928d4f9fb}">
+          <p14:sldIdLst>
+            <p14:sldId id="272"/>
+            <p14:sldId id="273"/>
+            <p14:sldId id="274"/>
           </p14:sldIdLst>
         </p14:section>
       </p14:sectionLst>
@@ -904,7 +916,7 @@
           <a:p>
             <a:r>
               <a:rPr lang="en-US" dirty="0"/>
-              <a:t>Licensing and availability change quickly – sources differ between GA and Frontier preview wording. Validate with the current Microsoft licensing page before budgeting.</a:t>
+              <a:t>A blueprint is the template agents are created from. It holds the credentials, the permissions every child agent inherits, and the owners and sponsors. The blueprint principal is its presence in our tenant. Each agent identity is one agent created from the blueprint and points back to it. An agent user is optional, for agents that need a mailbox or Teams presence.</a:t>
             </a:r>
             <a:endParaRPr lang="en-US" dirty="0"/>
           </a:p>
@@ -992,7 +1004,7 @@
           <a:p>
             <a:r>
               <a:rPr lang="en-US" dirty="0"/>
-              <a:t>Suggested phased adoption. Phase 1 needs only the admin center; later phases bring in Entra, Purview and Defender owners.</a:t>
+              <a:t>Entra Agent ID is the identity and security layer. The Agent 365 registry is the inventory and governance layer. They are linked: each registry entry stores the blueprint ID, agent identity ID and agent user ID. Our tenant export on 11 October 2026 found no blueprints or agent identities yet.</a:t>
             </a:r>
             <a:endParaRPr lang="en-US" dirty="0"/>
           </a:p>
@@ -1080,7 +1092,7 @@
           <a:p>
             <a:r>
               <a:rPr lang="en-US" dirty="0"/>
-              <a:t>Close with the four outcomes and open the floor for questions and next steps.</a:t>
+              <a:t>Four controls live on the blueprint. Inheritable permissions: approving them approves them for every agent created from the blueprint. Credentials are held by the blueprint. A sponsor is required when the blueprint is created. Conditional Access policies can target a blueprint, covering all of its agents.</a:t>
             </a:r>
             <a:endParaRPr lang="en-US" dirty="0"/>
           </a:p>
@@ -1104,6 +1116,358 @@
             <a:fld id="{F7021451-1387-4CA6-816F-3879F97B5CBC}" type="slidenum">
               <a:rPr lang="en-US"/>
               <a:t>15</a:t>
+            </a:fld>
+            <a:endParaRPr lang="en-US"/>
+          </a:p>
+        </p:txBody>
+      </p:sp>
+    </p:spTree>
+    <p:extLst>
+      <p:ext uri="{BB962C8B-B14F-4D97-AF65-F5344CB8AC3E}">
+        <p14:creationId xmlns:p14="http://schemas.microsoft.com/office/powerpoint/2010/main" val="1024086991"/>
+      </p:ext>
+    </p:extLst>
+  </p:cSld>
+  <p:clrMapOvr>
+    <a:masterClrMapping/>
+  </p:clrMapOvr>
+</p:notes>
+</file>
+
+<file path=ppt/notesSlides/notesSlide16.xml><?xml version="1.0" encoding="utf-8"?>
+<p:notes xmlns:a="http://schemas.openxmlformats.org/drawingml/2006/main" xmlns:r="http://schemas.openxmlformats.org/officeDocument/2006/relationships" xmlns:p="http://schemas.openxmlformats.org/presentationml/2006/main">
+  <p:cSld>
+    <p:spTree>
+      <p:nvGrpSpPr>
+        <p:cNvPr id="1" name=""/>
+        <p:cNvGrpSpPr/>
+        <p:nvPr/>
+      </p:nvGrpSpPr>
+      <p:grpSpPr>
+        <a:xfrm>
+          <a:off x="0" y="0"/>
+          <a:ext cx="0" cy="0"/>
+          <a:chOff x="0" y="0"/>
+          <a:chExt cx="0" cy="0"/>
+        </a:xfrm>
+      </p:grpSpPr>
+      <p:sp>
+        <p:nvSpPr>
+          <p:cNvPr id="2" name="Slide Image Placeholder 1"/>
+          <p:cNvSpPr>
+            <a:spLocks noGrp="1" noRot="1" noChangeAspect="1"/>
+          </p:cNvSpPr>
+          <p:nvPr>
+            <p:ph type="sldImg"/>
+          </p:nvPr>
+        </p:nvSpPr>
+        <p:spPr/>
+      </p:sp>
+      <p:sp>
+        <p:nvSpPr>
+          <p:cNvPr id="3" name="Notes Placeholder 2"/>
+          <p:cNvSpPr>
+            <a:spLocks noGrp="1"/>
+          </p:cNvSpPr>
+          <p:nvPr>
+            <p:ph type="body" idx="1"/>
+          </p:nvPr>
+        </p:nvSpPr>
+        <p:spPr/>
+        <p:txBody>
+          <a:bodyPr/>
+          <a:lstStyle/>
+          <a:p>
+            <a:r>
+              <a:rPr lang="en-US" dirty="0"/>
+              <a:t>Checklist to apply as blueprints start appearing in our tenant. Before relying on disabling a blueprint as a kill switch in an incident, test what disabling does in our tenant.</a:t>
+            </a:r>
+            <a:endParaRPr lang="en-US" dirty="0"/>
+          </a:p>
+        </p:txBody>
+      </p:sp>
+      <p:sp>
+        <p:nvSpPr>
+          <p:cNvPr id="4" name="Slide Number Placeholder 3"/>
+          <p:cNvSpPr>
+            <a:spLocks noGrp="1"/>
+          </p:cNvSpPr>
+          <p:nvPr>
+            <p:ph type="sldNum" sz="quarter" idx="10"/>
+          </p:nvPr>
+        </p:nvSpPr>
+        <p:spPr/>
+        <p:txBody>
+          <a:bodyPr/>
+          <a:lstStyle/>
+          <a:p>
+            <a:fld id="{F7021451-1387-4CA6-816F-3879F97B5CBC}" type="slidenum">
+              <a:rPr lang="en-US"/>
+              <a:t>16</a:t>
+            </a:fld>
+            <a:endParaRPr lang="en-US"/>
+          </a:p>
+        </p:txBody>
+      </p:sp>
+    </p:spTree>
+    <p:extLst>
+      <p:ext uri="{BB962C8B-B14F-4D97-AF65-F5344CB8AC3E}">
+        <p14:creationId xmlns:p14="http://schemas.microsoft.com/office/powerpoint/2010/main" val="1024086991"/>
+      </p:ext>
+    </p:extLst>
+  </p:cSld>
+  <p:clrMapOvr>
+    <a:masterClrMapping/>
+  </p:clrMapOvr>
+</p:notes>
+</file>
+
+<file path=ppt/notesSlides/notesSlide17.xml><?xml version="1.0" encoding="utf-8"?>
+<p:notes xmlns:a="http://schemas.openxmlformats.org/drawingml/2006/main" xmlns:r="http://schemas.openxmlformats.org/officeDocument/2006/relationships" xmlns:p="http://schemas.openxmlformats.org/presentationml/2006/main">
+  <p:cSld>
+    <p:spTree>
+      <p:nvGrpSpPr>
+        <p:cNvPr id="1" name=""/>
+        <p:cNvGrpSpPr/>
+        <p:nvPr/>
+      </p:nvGrpSpPr>
+      <p:grpSpPr>
+        <a:xfrm>
+          <a:off x="0" y="0"/>
+          <a:ext cx="0" cy="0"/>
+          <a:chOff x="0" y="0"/>
+          <a:chExt cx="0" cy="0"/>
+        </a:xfrm>
+      </p:grpSpPr>
+      <p:sp>
+        <p:nvSpPr>
+          <p:cNvPr id="2" name="Slide Image Placeholder 1"/>
+          <p:cNvSpPr>
+            <a:spLocks noGrp="1" noRot="1" noChangeAspect="1"/>
+          </p:cNvSpPr>
+          <p:nvPr>
+            <p:ph type="sldImg"/>
+          </p:nvPr>
+        </p:nvSpPr>
+        <p:spPr/>
+      </p:sp>
+      <p:sp>
+        <p:nvSpPr>
+          <p:cNvPr id="3" name="Notes Placeholder 2"/>
+          <p:cNvSpPr>
+            <a:spLocks noGrp="1"/>
+          </p:cNvSpPr>
+          <p:nvPr>
+            <p:ph type="body" idx="1"/>
+          </p:nvPr>
+        </p:nvSpPr>
+        <p:spPr/>
+        <p:txBody>
+          <a:bodyPr/>
+          <a:lstStyle/>
+          <a:p>
+            <a:r>
+              <a:rPr lang="en-US" dirty="0"/>
+              <a:t>Licensing and availability change quickly – sources differ between GA and Frontier preview wording. Validate with the current Microsoft licensing page before budgeting.</a:t>
+            </a:r>
+            <a:endParaRPr lang="en-US" dirty="0"/>
+          </a:p>
+        </p:txBody>
+      </p:sp>
+      <p:sp>
+        <p:nvSpPr>
+          <p:cNvPr id="4" name="Slide Number Placeholder 3"/>
+          <p:cNvSpPr>
+            <a:spLocks noGrp="1"/>
+          </p:cNvSpPr>
+          <p:nvPr>
+            <p:ph type="sldNum" sz="quarter" idx="10"/>
+          </p:nvPr>
+        </p:nvSpPr>
+        <p:spPr/>
+        <p:txBody>
+          <a:bodyPr/>
+          <a:lstStyle/>
+          <a:p>
+            <a:fld id="{F7021451-1387-4CA6-816F-3879F97B5CBC}" type="slidenum">
+              <a:rPr lang="en-US"/>
+              <a:t>17</a:t>
+            </a:fld>
+            <a:endParaRPr lang="en-US"/>
+          </a:p>
+        </p:txBody>
+      </p:sp>
+    </p:spTree>
+    <p:extLst>
+      <p:ext uri="{BB962C8B-B14F-4D97-AF65-F5344CB8AC3E}">
+        <p14:creationId xmlns:p14="http://schemas.microsoft.com/office/powerpoint/2010/main" val="1024086991"/>
+      </p:ext>
+    </p:extLst>
+  </p:cSld>
+  <p:clrMapOvr>
+    <a:masterClrMapping/>
+  </p:clrMapOvr>
+</p:notes>
+</file>
+
+<file path=ppt/notesSlides/notesSlide18.xml><?xml version="1.0" encoding="utf-8"?>
+<p:notes xmlns:a="http://schemas.openxmlformats.org/drawingml/2006/main" xmlns:r="http://schemas.openxmlformats.org/officeDocument/2006/relationships" xmlns:p="http://schemas.openxmlformats.org/presentationml/2006/main">
+  <p:cSld>
+    <p:spTree>
+      <p:nvGrpSpPr>
+        <p:cNvPr id="1" name=""/>
+        <p:cNvGrpSpPr/>
+        <p:nvPr/>
+      </p:nvGrpSpPr>
+      <p:grpSpPr>
+        <a:xfrm>
+          <a:off x="0" y="0"/>
+          <a:ext cx="0" cy="0"/>
+          <a:chOff x="0" y="0"/>
+          <a:chExt cx="0" cy="0"/>
+        </a:xfrm>
+      </p:grpSpPr>
+      <p:sp>
+        <p:nvSpPr>
+          <p:cNvPr id="2" name="Slide Image Placeholder 1"/>
+          <p:cNvSpPr>
+            <a:spLocks noGrp="1" noRot="1" noChangeAspect="1"/>
+          </p:cNvSpPr>
+          <p:nvPr>
+            <p:ph type="sldImg"/>
+          </p:nvPr>
+        </p:nvSpPr>
+        <p:spPr/>
+      </p:sp>
+      <p:sp>
+        <p:nvSpPr>
+          <p:cNvPr id="3" name="Notes Placeholder 2"/>
+          <p:cNvSpPr>
+            <a:spLocks noGrp="1"/>
+          </p:cNvSpPr>
+          <p:nvPr>
+            <p:ph type="body" idx="1"/>
+          </p:nvPr>
+        </p:nvSpPr>
+        <p:spPr/>
+        <p:txBody>
+          <a:bodyPr/>
+          <a:lstStyle/>
+          <a:p>
+            <a:r>
+              <a:rPr lang="en-US" dirty="0"/>
+              <a:t>Suggested phased adoption. Phase 1 needs only the admin center; later phases bring in Entra, Purview and Defender owners.</a:t>
+            </a:r>
+            <a:endParaRPr lang="en-US" dirty="0"/>
+          </a:p>
+        </p:txBody>
+      </p:sp>
+      <p:sp>
+        <p:nvSpPr>
+          <p:cNvPr id="4" name="Slide Number Placeholder 3"/>
+          <p:cNvSpPr>
+            <a:spLocks noGrp="1"/>
+          </p:cNvSpPr>
+          <p:nvPr>
+            <p:ph type="sldNum" sz="quarter" idx="10"/>
+          </p:nvPr>
+        </p:nvSpPr>
+        <p:spPr/>
+        <p:txBody>
+          <a:bodyPr/>
+          <a:lstStyle/>
+          <a:p>
+            <a:fld id="{F7021451-1387-4CA6-816F-3879F97B5CBC}" type="slidenum">
+              <a:rPr lang="en-US"/>
+              <a:t>18</a:t>
+            </a:fld>
+            <a:endParaRPr lang="en-US"/>
+          </a:p>
+        </p:txBody>
+      </p:sp>
+    </p:spTree>
+    <p:extLst>
+      <p:ext uri="{BB962C8B-B14F-4D97-AF65-F5344CB8AC3E}">
+        <p14:creationId xmlns:p14="http://schemas.microsoft.com/office/powerpoint/2010/main" val="1024086991"/>
+      </p:ext>
+    </p:extLst>
+  </p:cSld>
+  <p:clrMapOvr>
+    <a:masterClrMapping/>
+  </p:clrMapOvr>
+</p:notes>
+</file>
+
+<file path=ppt/notesSlides/notesSlide19.xml><?xml version="1.0" encoding="utf-8"?>
+<p:notes xmlns:a="http://schemas.openxmlformats.org/drawingml/2006/main" xmlns:r="http://schemas.openxmlformats.org/officeDocument/2006/relationships" xmlns:p="http://schemas.openxmlformats.org/presentationml/2006/main">
+  <p:cSld>
+    <p:spTree>
+      <p:nvGrpSpPr>
+        <p:cNvPr id="1" name=""/>
+        <p:cNvGrpSpPr/>
+        <p:nvPr/>
+      </p:nvGrpSpPr>
+      <p:grpSpPr>
+        <a:xfrm>
+          <a:off x="0" y="0"/>
+          <a:ext cx="0" cy="0"/>
+          <a:chOff x="0" y="0"/>
+          <a:chExt cx="0" cy="0"/>
+        </a:xfrm>
+      </p:grpSpPr>
+      <p:sp>
+        <p:nvSpPr>
+          <p:cNvPr id="2" name="Slide Image Placeholder 1"/>
+          <p:cNvSpPr>
+            <a:spLocks noGrp="1" noRot="1" noChangeAspect="1"/>
+          </p:cNvSpPr>
+          <p:nvPr>
+            <p:ph type="sldImg"/>
+          </p:nvPr>
+        </p:nvSpPr>
+        <p:spPr/>
+      </p:sp>
+      <p:sp>
+        <p:nvSpPr>
+          <p:cNvPr id="3" name="Notes Placeholder 2"/>
+          <p:cNvSpPr>
+            <a:spLocks noGrp="1"/>
+          </p:cNvSpPr>
+          <p:nvPr>
+            <p:ph type="body" idx="1"/>
+          </p:nvPr>
+        </p:nvSpPr>
+        <p:spPr/>
+        <p:txBody>
+          <a:bodyPr/>
+          <a:lstStyle/>
+          <a:p>
+            <a:r>
+              <a:rPr lang="en-US" dirty="0"/>
+              <a:t>Close with the four outcomes and open the floor for questions and next steps.</a:t>
+            </a:r>
+            <a:endParaRPr lang="en-US" dirty="0"/>
+          </a:p>
+        </p:txBody>
+      </p:sp>
+      <p:sp>
+        <p:nvSpPr>
+          <p:cNvPr id="4" name="Slide Number Placeholder 3"/>
+          <p:cNvSpPr>
+            <a:spLocks noGrp="1"/>
+          </p:cNvSpPr>
+          <p:nvPr>
+            <p:ph type="sldNum" sz="quarter" idx="10"/>
+          </p:nvPr>
+        </p:nvSpPr>
+        <p:spPr/>
+        <p:txBody>
+          <a:bodyPr/>
+          <a:lstStyle/>
+          <a:p>
+            <a:fld id="{F7021451-1387-4CA6-816F-3879F97B5CBC}" type="slidenum">
+              <a:rPr lang="en-US"/>
+              <a:t>19</a:t>
             </a:fld>
             <a:endParaRPr lang="en-US"/>
           </a:p>
@@ -4562,6 +4926,42 @@
       <p:sp>
         <p:nvSpPr>
           <p:cNvPr id="2" name="Text 0"/>
+          <p:cNvSpPr txBox="1"/>
+          <p:nvPr/>
+        </p:nvSpPr>
+        <p:spPr>
+          <a:xfrm>
+            <a:off x="457200" y="274320"/>
+            <a:ext cx="3657600" cy="201168"/>
+          </a:xfrm>
+          <a:prstGeom prst="rect">
+            <a:avLst/>
+          </a:prstGeom>
+          <a:noFill/>
+          <a:ln/>
+        </p:spPr>
+        <p:txBody>
+          <a:bodyPr wrap="square" lIns="0" tIns="0" rIns="0" bIns="0" rtlCol="0" anchor="ctr"/>
+          <a:lstStyle/>
+          <a:p>
+            <a:pPr indent="0" marL="0">
+              <a:buNone/>
+            </a:pPr>
+            <a:r>
+              <a:rPr lang="en-US" sz="1000" b="1" spc="200" kern="0" dirty="0">
+                <a:solidFill>
+                  <a:schemeClr val="accent1"/>
+                </a:solidFill>
+              </a:rPr>
+              <a:t>BLUEPRINTS  ·  CONCEPT</a:t>
+            </a:r>
+            <a:endParaRPr lang="en-US" sz="1000" dirty="0"/>
+          </a:p>
+        </p:txBody>
+      </p:sp>
+      <p:sp>
+        <p:nvSpPr>
+          <p:cNvPr id="3" name="Text 0"/>
           <p:cNvSpPr/>
           <p:nvPr>
             <p:ph idx="100" type="title" hasCustomPrompt="1"/>
@@ -4591,7 +4991,7 @@
                   <a:schemeClr val="tx2"/>
                 </a:solidFill>
               </a:rPr>
-              <a:t>Before we start: licensing and prerequisites</a:t>
+              <a:t>Blueprints: the template behind every agent</a:t>
             </a:r>
             <a:endParaRPr lang="en-US" sz="2800" dirty="0"/>
           </a:p>
@@ -4599,49 +4999,49 @@
       </p:sp>
       <p:sp>
         <p:nvSpPr>
-          <p:cNvPr id="3" name="Prereq row 1"/>
+          <p:cNvPr id="4" name="Blueprint box"/>
           <p:cNvSpPr/>
           <p:nvPr/>
         </p:nvSpPr>
         <p:spPr>
           <a:xfrm>
-            <a:off x="457200" y="1280160"/>
-            <a:ext cx="8229600" cy="960120"/>
+            <a:off x="2286000" y="1234440"/>
+            <a:ext cx="4572000" cy="868680"/>
           </a:xfrm>
           <a:prstGeom prst="roundRect">
             <a:avLst>
-              <a:gd name="adj" fmla="val 9524"/>
+              <a:gd name="adj" fmla="val 12632"/>
             </a:avLst>
           </a:prstGeom>
           <a:solidFill>
-            <a:schemeClr val="bg2"/>
+            <a:schemeClr val="tx2"/>
           </a:solidFill>
           <a:ln/>
         </p:spPr>
       </p:sp>
       <p:sp>
         <p:nvSpPr>
-          <p:cNvPr id="4" name="Prereq icon bg 1"/>
+          <p:cNvPr id="5" name="Blueprint icon bg"/>
           <p:cNvSpPr/>
           <p:nvPr/>
         </p:nvSpPr>
         <p:spPr>
           <a:xfrm>
-            <a:off x="658368" y="1508760"/>
+            <a:off x="2468880" y="1417320"/>
             <a:ext cx="502920" cy="502920"/>
           </a:xfrm>
           <a:prstGeom prst="ellipse">
             <a:avLst/>
           </a:prstGeom>
           <a:solidFill>
-            <a:schemeClr val="accent3"/>
+            <a:schemeClr val="accent1"/>
           </a:solidFill>
           <a:ln/>
         </p:spPr>
       </p:sp>
       <p:pic>
         <p:nvPicPr>
-          <p:cNvPr id="5" name="Image 0" descr="Licensing">    </p:cNvPr>
+          <p:cNvPr id="6" name="Image 0" descr="Blueprint">    </p:cNvPr>
           <p:cNvPicPr>
             <a:picLocks noChangeAspect="1"/>
           </p:cNvPicPr>
@@ -4655,7 +5055,7 @@
         </p:blipFill>
         <p:spPr>
           <a:xfrm>
-            <a:off x="768096" y="1618488"/>
+            <a:off x="2578608" y="1527048"/>
             <a:ext cx="283464" cy="283464"/>
           </a:xfrm>
           <a:prstGeom prst="rect">
@@ -4663,42 +5063,6 @@
           </a:prstGeom>
         </p:spPr>
       </p:pic>
-      <p:sp>
-        <p:nvSpPr>
-          <p:cNvPr id="6" name="Text 3"/>
-          <p:cNvSpPr txBox="1"/>
-          <p:nvPr/>
-        </p:nvSpPr>
-        <p:spPr>
-          <a:xfrm>
-            <a:off x="1371600" y="1280160"/>
-            <a:ext cx="1554480" cy="960120"/>
-          </a:xfrm>
-          <a:prstGeom prst="rect">
-            <a:avLst/>
-          </a:prstGeom>
-          <a:noFill/>
-          <a:ln/>
-        </p:spPr>
-        <p:txBody>
-          <a:bodyPr wrap="square" lIns="0" tIns="0" rIns="0" bIns="0" rtlCol="0" anchor="ctr"/>
-          <a:lstStyle/>
-          <a:p>
-            <a:pPr indent="0" marL="0">
-              <a:buNone/>
-            </a:pPr>
-            <a:r>
-              <a:rPr lang="en-US" sz="1600" b="1" dirty="0">
-                <a:solidFill>
-                  <a:schemeClr val="tx2"/>
-                </a:solidFill>
-              </a:rPr>
-              <a:t>Licensing</a:t>
-            </a:r>
-            <a:endParaRPr lang="en-US" sz="1600" dirty="0"/>
-          </a:p>
-        </p:txBody>
-      </p:sp>
       <p:sp>
         <p:nvSpPr>
           <p:cNvPr id="7" name="Text 4"/>
@@ -4707,8 +5071,8 @@
         </p:nvSpPr>
         <p:spPr>
           <a:xfrm>
-            <a:off x="2926080" y="1280160"/>
-            <a:ext cx="5577840" cy="960120"/>
+            <a:off x="3108960" y="1234440"/>
+            <a:ext cx="3657600" cy="868680"/>
           </a:xfrm>
           <a:prstGeom prst="rect">
             <a:avLst/>
@@ -4724,31 +5088,114 @@
               <a:buNone/>
             </a:pPr>
             <a:r>
-              <a:rPr lang="en-US" sz="1300" dirty="0">
-                <a:solidFill>
-                  <a:schemeClr val="tx1"/>
-                </a:solidFill>
-              </a:rPr>
-              <a:t>Agent 365 is licensed per user. Microsoft docs say it became generally available for the commercial segment on 1 May 2026 (earlier access was through the Frontier preview). Confirm current SKU and pricing with our Microsoft partner.</a:t>
-            </a:r>
-            <a:endParaRPr lang="en-US" sz="1300" dirty="0"/>
-          </a:p>
-        </p:txBody>
-      </p:sp>
-      <p:sp>
-        <p:nvSpPr>
-          <p:cNvPr id="8" name="Prereq row 2"/>
+              <a:rPr lang="en-US" sz="1500" b="1" dirty="0">
+                <a:solidFill>
+                  <a:schemeClr val="bg1"/>
+                </a:solidFill>
+              </a:rPr>
+              <a:t>Agent identity blueprint</a:t>
+            </a:r>
+            <a:endParaRPr lang="en-US" sz="1500" dirty="0"/>
+          </a:p>
+          <a:p>
+            <a:pPr indent="0" marL="0">
+              <a:buNone/>
+            </a:pPr>
+            <a:r>
+              <a:rPr lang="en-US" sz="1100" dirty="0">
+                <a:solidFill>
+                  <a:schemeClr val="bg2"/>
+                </a:solidFill>
+              </a:rPr>
+              <a:t>Holds credentials, inheritable permissions, owners and sponsors</a:t>
+            </a:r>
+            <a:endParaRPr lang="en-US" sz="1500" dirty="0"/>
+          </a:p>
+        </p:txBody>
+      </p:sp>
+      <p:sp>
+        <p:nvSpPr>
+          <p:cNvPr id="8" name="Trunk"/>
           <p:cNvSpPr/>
           <p:nvPr/>
         </p:nvSpPr>
         <p:spPr>
           <a:xfrm>
-            <a:off x="457200" y="2395728"/>
-            <a:ext cx="8229600" cy="960120"/>
+            <a:off x="4572000" y="2103120"/>
+            <a:ext cx="0" cy="274320"/>
+          </a:xfrm>
+          <a:prstGeom prst="line">
+            <a:avLst/>
+          </a:prstGeom>
+          <a:noFill/>
+          <a:ln w="19050">
+            <a:solidFill>
+              <a:schemeClr val="accent6"/>
+            </a:solidFill>
+            <a:prstDash val="solid"/>
+          </a:ln>
+        </p:spPr>
+      </p:sp>
+      <p:sp>
+        <p:nvSpPr>
+          <p:cNvPr id="9" name="Branch"/>
+          <p:cNvSpPr/>
+          <p:nvPr/>
+        </p:nvSpPr>
+        <p:spPr>
+          <a:xfrm>
+            <a:off x="1371600" y="2377440"/>
+            <a:ext cx="6400800" cy="0"/>
+          </a:xfrm>
+          <a:prstGeom prst="line">
+            <a:avLst/>
+          </a:prstGeom>
+          <a:noFill/>
+          <a:ln w="19050">
+            <a:solidFill>
+              <a:schemeClr val="accent6"/>
+            </a:solidFill>
+            <a:prstDash val="solid"/>
+          </a:ln>
+        </p:spPr>
+      </p:sp>
+      <p:sp>
+        <p:nvSpPr>
+          <p:cNvPr id="10" name="Drop 1"/>
+          <p:cNvSpPr/>
+          <p:nvPr/>
+        </p:nvSpPr>
+        <p:spPr>
+          <a:xfrm>
+            <a:off x="1371600" y="2377440"/>
+            <a:ext cx="0" cy="228600"/>
+          </a:xfrm>
+          <a:prstGeom prst="line">
+            <a:avLst/>
+          </a:prstGeom>
+          <a:noFill/>
+          <a:ln w="19050">
+            <a:solidFill>
+              <a:schemeClr val="accent6"/>
+            </a:solidFill>
+            <a:prstDash val="solid"/>
+          </a:ln>
+        </p:spPr>
+      </p:sp>
+      <p:sp>
+        <p:nvSpPr>
+          <p:cNvPr id="11" name="Child 1"/>
+          <p:cNvSpPr/>
+          <p:nvPr/>
+        </p:nvSpPr>
+        <p:spPr>
+          <a:xfrm>
+            <a:off x="457200" y="2606040"/>
+            <a:ext cx="1828800" cy="914400"/>
           </a:xfrm>
           <a:prstGeom prst="roundRect">
             <a:avLst>
-              <a:gd name="adj" fmla="val 9524"/>
+              <a:gd name="adj" fmla="val 10000"/>
             </a:avLst>
           </a:prstGeom>
           <a:solidFill>
@@ -4759,196 +5206,204 @@
       </p:sp>
       <p:sp>
         <p:nvSpPr>
-          <p:cNvPr id="9" name="Prereq icon bg 2"/>
+          <p:cNvPr id="12" name="Text 9"/>
+          <p:cNvSpPr txBox="1"/>
+          <p:nvPr/>
+        </p:nvSpPr>
+        <p:spPr>
+          <a:xfrm>
+            <a:off x="566928" y="2606040"/>
+            <a:ext cx="1609344" cy="914400"/>
+          </a:xfrm>
+          <a:prstGeom prst="rect">
+            <a:avLst/>
+          </a:prstGeom>
+          <a:noFill/>
+          <a:ln/>
+        </p:spPr>
+        <p:txBody>
+          <a:bodyPr wrap="square" lIns="0" tIns="0" rIns="0" bIns="0" rtlCol="0" anchor="ctr"/>
+          <a:lstStyle/>
+          <a:p>
+            <a:pPr indent="0" marL="0">
+              <a:buNone/>
+            </a:pPr>
+            <a:r>
+              <a:rPr lang="en-US" sz="1300" b="1" dirty="0">
+                <a:solidFill>
+                  <a:schemeClr val="tx2"/>
+                </a:solidFill>
+              </a:rPr>
+              <a:t>Blueprint principal</a:t>
+            </a:r>
+            <a:endParaRPr lang="en-US" sz="1300" dirty="0"/>
+          </a:p>
+          <a:p>
+            <a:pPr indent="0" marL="0">
+              <a:buNone/>
+            </a:pPr>
+            <a:r>
+              <a:rPr lang="en-US" sz="1100" dirty="0">
+                <a:solidFill>
+                  <a:schemeClr val="tx2"/>
+                </a:solidFill>
+              </a:rPr>
+              <a:t>Its presence in our tenant (like an enterprise app)</a:t>
+            </a:r>
+            <a:endParaRPr lang="en-US" sz="1300" dirty="0"/>
+          </a:p>
+        </p:txBody>
+      </p:sp>
+      <p:sp>
+        <p:nvSpPr>
+          <p:cNvPr id="13" name="Drop 2"/>
           <p:cNvSpPr/>
           <p:nvPr/>
         </p:nvSpPr>
         <p:spPr>
           <a:xfrm>
-            <a:off x="658368" y="2624328"/>
-            <a:ext cx="502920" cy="502920"/>
-          </a:xfrm>
-          <a:prstGeom prst="ellipse">
-            <a:avLst/>
-          </a:prstGeom>
-          <a:solidFill>
-            <a:schemeClr val="accent3"/>
-          </a:solidFill>
-          <a:ln/>
-        </p:spPr>
-      </p:sp>
-      <p:pic>
-        <p:nvPicPr>
-          <p:cNvPr id="10" name="Image 1" descr="Admin roles">    </p:cNvPr>
-          <p:cNvPicPr>
-            <a:picLocks noChangeAspect="1"/>
-          </p:cNvPicPr>
-          <p:nvPr/>
-        </p:nvPicPr>
-        <p:blipFill>
-          <a:blip r:embed="rId2"/>
-          <a:stretch>
-            <a:fillRect/>
-          </a:stretch>
-        </p:blipFill>
-        <p:spPr>
-          <a:xfrm>
-            <a:off x="768096" y="2734056"/>
-            <a:ext cx="283464" cy="283464"/>
-          </a:xfrm>
-          <a:prstGeom prst="rect">
-            <a:avLst/>
-          </a:prstGeom>
-        </p:spPr>
-      </p:pic>
-      <p:sp>
-        <p:nvSpPr>
-          <p:cNvPr id="11" name="Text 7"/>
-          <p:cNvSpPr txBox="1"/>
-          <p:nvPr/>
-        </p:nvSpPr>
-        <p:spPr>
-          <a:xfrm>
-            <a:off x="1371600" y="2395728"/>
-            <a:ext cx="1554480" cy="960120"/>
-          </a:xfrm>
-          <a:prstGeom prst="rect">
-            <a:avLst/>
-          </a:prstGeom>
-          <a:noFill/>
-          <a:ln/>
-        </p:spPr>
-        <p:txBody>
-          <a:bodyPr wrap="square" lIns="0" tIns="0" rIns="0" bIns="0" rtlCol="0" anchor="ctr"/>
-          <a:lstStyle/>
-          <a:p>
-            <a:pPr indent="0" marL="0">
-              <a:buNone/>
-            </a:pPr>
-            <a:r>
-              <a:rPr lang="en-US" sz="1600" b="1" dirty="0">
-                <a:solidFill>
-                  <a:schemeClr val="tx2"/>
-                </a:solidFill>
-              </a:rPr>
-              <a:t>Admin roles</a:t>
-            </a:r>
-            <a:endParaRPr lang="en-US" sz="1600" dirty="0"/>
-          </a:p>
-        </p:txBody>
-      </p:sp>
-      <p:sp>
-        <p:nvSpPr>
-          <p:cNvPr id="12" name="Text 8"/>
-          <p:cNvSpPr txBox="1"/>
-          <p:nvPr/>
-        </p:nvSpPr>
-        <p:spPr>
-          <a:xfrm>
-            <a:off x="2926080" y="2395728"/>
-            <a:ext cx="5577840" cy="960120"/>
-          </a:xfrm>
-          <a:prstGeom prst="rect">
-            <a:avLst/>
-          </a:prstGeom>
-          <a:noFill/>
-          <a:ln/>
-        </p:spPr>
-        <p:txBody>
-          <a:bodyPr wrap="square" lIns="0" tIns="0" rIns="0" bIns="0" rtlCol="0" anchor="ctr"/>
-          <a:lstStyle/>
-          <a:p>
-            <a:pPr indent="0" marL="0">
-              <a:buNone/>
-            </a:pPr>
-            <a:r>
-              <a:rPr lang="en-US" sz="1300" dirty="0">
-                <a:solidFill>
-                  <a:schemeClr val="tx1"/>
-                </a:solidFill>
-              </a:rPr>
-              <a:t>Global Administrator or AI Administrator to manage Agent 365 in the admin center; Entra, Purview and Defender roles for their parts.</a:t>
-            </a:r>
-            <a:endParaRPr lang="en-US" sz="1300" dirty="0"/>
-          </a:p>
-        </p:txBody>
-      </p:sp>
-      <p:sp>
-        <p:nvSpPr>
-          <p:cNvPr id="13" name="Prereq row 3"/>
+            <a:off x="3504895" y="2377440"/>
+            <a:ext cx="0" cy="228600"/>
+          </a:xfrm>
+          <a:prstGeom prst="line">
+            <a:avLst/>
+          </a:prstGeom>
+          <a:noFill/>
+          <a:ln w="19050">
+            <a:solidFill>
+              <a:schemeClr val="accent6"/>
+            </a:solidFill>
+            <a:prstDash val="solid"/>
+          </a:ln>
+        </p:spPr>
+      </p:sp>
+      <p:sp>
+        <p:nvSpPr>
+          <p:cNvPr id="14" name="Child 2"/>
           <p:cNvSpPr/>
           <p:nvPr/>
         </p:nvSpPr>
         <p:spPr>
           <a:xfrm>
-            <a:off x="457200" y="3511296"/>
-            <a:ext cx="8229600" cy="960120"/>
+            <a:off x="2590495" y="2606040"/>
+            <a:ext cx="1828800" cy="914400"/>
           </a:xfrm>
           <a:prstGeom prst="roundRect">
             <a:avLst>
-              <a:gd name="adj" fmla="val 9524"/>
+              <a:gd name="adj" fmla="val 10000"/>
             </a:avLst>
           </a:prstGeom>
           <a:solidFill>
-            <a:schemeClr val="bg2"/>
+            <a:schemeClr val="accent1"/>
           </a:solidFill>
           <a:ln/>
         </p:spPr>
       </p:sp>
       <p:sp>
         <p:nvSpPr>
-          <p:cNvPr id="14" name="Prereq icon bg 3"/>
+          <p:cNvPr id="15" name="Text 12"/>
+          <p:cNvSpPr txBox="1"/>
+          <p:nvPr/>
+        </p:nvSpPr>
+        <p:spPr>
+          <a:xfrm>
+            <a:off x="2700223" y="2606040"/>
+            <a:ext cx="1609344" cy="914400"/>
+          </a:xfrm>
+          <a:prstGeom prst="rect">
+            <a:avLst/>
+          </a:prstGeom>
+          <a:noFill/>
+          <a:ln/>
+        </p:spPr>
+        <p:txBody>
+          <a:bodyPr wrap="square" lIns="0" tIns="0" rIns="0" bIns="0" rtlCol="0" anchor="ctr"/>
+          <a:lstStyle/>
+          <a:p>
+            <a:pPr indent="0" marL="0">
+              <a:buNone/>
+            </a:pPr>
+            <a:r>
+              <a:rPr lang="en-US" sz="1300" b="1" dirty="0">
+                <a:solidFill>
+                  <a:schemeClr val="bg1"/>
+                </a:solidFill>
+              </a:rPr>
+              <a:t>Agent identity</a:t>
+            </a:r>
+            <a:endParaRPr lang="en-US" sz="1300" dirty="0"/>
+          </a:p>
+          <a:p>
+            <a:pPr indent="0" marL="0">
+              <a:buNone/>
+            </a:pPr>
+            <a:r>
+              <a:rPr lang="en-US" sz="1100" dirty="0">
+                <a:solidFill>
+                  <a:schemeClr val="bg1"/>
+                </a:solidFill>
+              </a:rPr>
+              <a:t>e.g. “HR Helper – Finance”</a:t>
+            </a:r>
+            <a:endParaRPr lang="en-US" sz="1300" dirty="0"/>
+          </a:p>
+        </p:txBody>
+      </p:sp>
+      <p:sp>
+        <p:nvSpPr>
+          <p:cNvPr id="16" name="Drop 3"/>
           <p:cNvSpPr/>
           <p:nvPr/>
         </p:nvSpPr>
         <p:spPr>
           <a:xfrm>
-            <a:off x="658368" y="3739896"/>
-            <a:ext cx="502920" cy="502920"/>
-          </a:xfrm>
-          <a:prstGeom prst="ellipse">
-            <a:avLst/>
+            <a:off x="5638190" y="2377440"/>
+            <a:ext cx="0" cy="228600"/>
+          </a:xfrm>
+          <a:prstGeom prst="line">
+            <a:avLst/>
+          </a:prstGeom>
+          <a:noFill/>
+          <a:ln w="19050">
+            <a:solidFill>
+              <a:schemeClr val="accent6"/>
+            </a:solidFill>
+            <a:prstDash val="solid"/>
+          </a:ln>
+        </p:spPr>
+      </p:sp>
+      <p:sp>
+        <p:nvSpPr>
+          <p:cNvPr id="17" name="Child 3"/>
+          <p:cNvSpPr/>
+          <p:nvPr/>
+        </p:nvSpPr>
+        <p:spPr>
+          <a:xfrm>
+            <a:off x="4723790" y="2606040"/>
+            <a:ext cx="1828800" cy="914400"/>
+          </a:xfrm>
+          <a:prstGeom prst="roundRect">
+            <a:avLst>
+              <a:gd name="adj" fmla="val 10000"/>
+            </a:avLst>
           </a:prstGeom>
           <a:solidFill>
-            <a:schemeClr val="accent3"/>
+            <a:schemeClr val="accent1"/>
           </a:solidFill>
           <a:ln/>
         </p:spPr>
       </p:sp>
-      <p:pic>
-        <p:nvPicPr>
-          <p:cNvPr id="15" name="Image 2" descr="Watch-outs">    </p:cNvPr>
-          <p:cNvPicPr>
-            <a:picLocks noChangeAspect="1"/>
-          </p:cNvPicPr>
-          <p:nvPr/>
-        </p:nvPicPr>
-        <p:blipFill>
-          <a:blip r:embed="rId3"/>
-          <a:stretch>
-            <a:fillRect/>
-          </a:stretch>
-        </p:blipFill>
-        <p:spPr>
-          <a:xfrm>
-            <a:off x="768096" y="3849624"/>
-            <a:ext cx="283464" cy="283464"/>
-          </a:xfrm>
-          <a:prstGeom prst="rect">
-            <a:avLst/>
-          </a:prstGeom>
-        </p:spPr>
-      </p:pic>
-      <p:sp>
-        <p:nvSpPr>
-          <p:cNvPr id="16" name="Text 11"/>
+      <p:sp>
+        <p:nvSpPr>
+          <p:cNvPr id="18" name="Text 15"/>
           <p:cNvSpPr txBox="1"/>
           <p:nvPr/>
         </p:nvSpPr>
         <p:spPr>
           <a:xfrm>
-            <a:off x="1371600" y="3511296"/>
-            <a:ext cx="1554480" cy="960120"/>
+            <a:off x="4833518" y="2606040"/>
+            <a:ext cx="1609344" cy="914400"/>
           </a:xfrm>
           <a:prstGeom prst="rect">
             <a:avLst/>
@@ -4964,27 +5419,236 @@
               <a:buNone/>
             </a:pPr>
             <a:r>
-              <a:rPr lang="en-US" sz="1600" b="1" dirty="0">
+              <a:rPr lang="en-US" sz="1300" b="1" dirty="0">
+                <a:solidFill>
+                  <a:schemeClr val="bg1"/>
+                </a:solidFill>
+              </a:rPr>
+              <a:t>Agent identity</a:t>
+            </a:r>
+            <a:endParaRPr lang="en-US" sz="1300" dirty="0"/>
+          </a:p>
+          <a:p>
+            <a:pPr indent="0" marL="0">
+              <a:buNone/>
+            </a:pPr>
+            <a:r>
+              <a:rPr lang="en-US" sz="1100" dirty="0">
+                <a:solidFill>
+                  <a:schemeClr val="bg1"/>
+                </a:solidFill>
+              </a:rPr>
+              <a:t>e.g. “HR Helper – Sales”</a:t>
+            </a:r>
+            <a:endParaRPr lang="en-US" sz="1300" dirty="0"/>
+          </a:p>
+        </p:txBody>
+      </p:sp>
+      <p:sp>
+        <p:nvSpPr>
+          <p:cNvPr id="19" name="Drop 4"/>
+          <p:cNvSpPr/>
+          <p:nvPr/>
+        </p:nvSpPr>
+        <p:spPr>
+          <a:xfrm>
+            <a:off x="7771486" y="2377440"/>
+            <a:ext cx="0" cy="228600"/>
+          </a:xfrm>
+          <a:prstGeom prst="line">
+            <a:avLst/>
+          </a:prstGeom>
+          <a:noFill/>
+          <a:ln w="19050">
+            <a:solidFill>
+              <a:schemeClr val="accent6"/>
+            </a:solidFill>
+            <a:prstDash val="solid"/>
+          </a:ln>
+        </p:spPr>
+      </p:sp>
+      <p:sp>
+        <p:nvSpPr>
+          <p:cNvPr id="20" name="Child 4"/>
+          <p:cNvSpPr/>
+          <p:nvPr/>
+        </p:nvSpPr>
+        <p:spPr>
+          <a:xfrm>
+            <a:off x="6857086" y="2606040"/>
+            <a:ext cx="1828800" cy="914400"/>
+          </a:xfrm>
+          <a:prstGeom prst="roundRect">
+            <a:avLst>
+              <a:gd name="adj" fmla="val 10000"/>
+            </a:avLst>
+          </a:prstGeom>
+          <a:solidFill>
+            <a:schemeClr val="accent1"/>
+          </a:solidFill>
+          <a:ln/>
+        </p:spPr>
+      </p:sp>
+      <p:sp>
+        <p:nvSpPr>
+          <p:cNvPr id="21" name="Text 18"/>
+          <p:cNvSpPr txBox="1"/>
+          <p:nvPr/>
+        </p:nvSpPr>
+        <p:spPr>
+          <a:xfrm>
+            <a:off x="6966814" y="2606040"/>
+            <a:ext cx="1609344" cy="914400"/>
+          </a:xfrm>
+          <a:prstGeom prst="rect">
+            <a:avLst/>
+          </a:prstGeom>
+          <a:noFill/>
+          <a:ln/>
+        </p:spPr>
+        <p:txBody>
+          <a:bodyPr wrap="square" lIns="0" tIns="0" rIns="0" bIns="0" rtlCol="0" anchor="ctr"/>
+          <a:lstStyle/>
+          <a:p>
+            <a:pPr indent="0" marL="0">
+              <a:buNone/>
+            </a:pPr>
+            <a:r>
+              <a:rPr lang="en-US" sz="1300" b="1" dirty="0">
+                <a:solidFill>
+                  <a:schemeClr val="bg1"/>
+                </a:solidFill>
+              </a:rPr>
+              <a:t>Agent identity …</a:t>
+            </a:r>
+            <a:endParaRPr lang="en-US" sz="1300" dirty="0"/>
+          </a:p>
+          <a:p>
+            <a:pPr indent="0" marL="0">
+              <a:buNone/>
+            </a:pPr>
+            <a:r>
+              <a:rPr lang="en-US" sz="1100" dirty="0">
+                <a:solidFill>
+                  <a:schemeClr val="bg1"/>
+                </a:solidFill>
+              </a:rPr>
+              <a:t>one per agent, all inherit the blueprint</a:t>
+            </a:r>
+            <a:endParaRPr lang="en-US" sz="1300" dirty="0"/>
+          </a:p>
+        </p:txBody>
+      </p:sp>
+      <p:sp>
+        <p:nvSpPr>
+          <p:cNvPr id="22" name="Drop agent user"/>
+          <p:cNvSpPr/>
+          <p:nvPr/>
+        </p:nvSpPr>
+        <p:spPr>
+          <a:xfrm>
+            <a:off x="3502152" y="3520440"/>
+            <a:ext cx="0" cy="320040"/>
+          </a:xfrm>
+          <a:prstGeom prst="line">
+            <a:avLst/>
+          </a:prstGeom>
+          <a:noFill/>
+          <a:ln w="19050">
+            <a:solidFill>
+              <a:schemeClr val="accent6"/>
+            </a:solidFill>
+            <a:prstDash val="solid"/>
+          </a:ln>
+        </p:spPr>
+      </p:sp>
+      <p:sp>
+        <p:nvSpPr>
+          <p:cNvPr id="23" name="Agent user"/>
+          <p:cNvSpPr/>
+          <p:nvPr/>
+        </p:nvSpPr>
+        <p:spPr>
+          <a:xfrm>
+            <a:off x="2587752" y="3840480"/>
+            <a:ext cx="1828800" cy="731520"/>
+          </a:xfrm>
+          <a:prstGeom prst="roundRect">
+            <a:avLst>
+              <a:gd name="adj" fmla="val 12500"/>
+            </a:avLst>
+          </a:prstGeom>
+          <a:solidFill>
+            <a:schemeClr val="bg1"/>
+          </a:solidFill>
+          <a:ln w="15875">
+            <a:solidFill>
+              <a:schemeClr val="accent1"/>
+            </a:solidFill>
+            <a:prstDash val="dash"/>
+          </a:ln>
+        </p:spPr>
+      </p:sp>
+      <p:sp>
+        <p:nvSpPr>
+          <p:cNvPr id="24" name="Text 21"/>
+          <p:cNvSpPr txBox="1"/>
+          <p:nvPr/>
+        </p:nvSpPr>
+        <p:spPr>
+          <a:xfrm>
+            <a:off x="2697480" y="3840480"/>
+            <a:ext cx="1645920" cy="731520"/>
+          </a:xfrm>
+          <a:prstGeom prst="rect">
+            <a:avLst/>
+          </a:prstGeom>
+          <a:noFill/>
+          <a:ln/>
+        </p:spPr>
+        <p:txBody>
+          <a:bodyPr wrap="square" lIns="0" tIns="0" rIns="0" bIns="0" rtlCol="0" anchor="ctr"/>
+          <a:lstStyle/>
+          <a:p>
+            <a:pPr indent="0" marL="0">
+              <a:buNone/>
+            </a:pPr>
+            <a:r>
+              <a:rPr lang="en-US" sz="1200" b="1" dirty="0">
                 <a:solidFill>
                   <a:schemeClr val="tx2"/>
                 </a:solidFill>
               </a:rPr>
-              <a:t>Watch-outs</a:t>
-            </a:r>
-            <a:endParaRPr lang="en-US" sz="1600" dirty="0"/>
-          </a:p>
-        </p:txBody>
-      </p:sp>
-      <p:sp>
-        <p:nvSpPr>
-          <p:cNvPr id="17" name="Text 12"/>
+              <a:t>Agent user (optional)</a:t>
+            </a:r>
+            <a:endParaRPr lang="en-US" sz="1200" dirty="0"/>
+          </a:p>
+          <a:p>
+            <a:pPr indent="0" marL="0">
+              <a:buNone/>
+            </a:pPr>
+            <a:r>
+              <a:rPr lang="en-US" sz="1100" dirty="0">
+                <a:solidFill>
+                  <a:schemeClr val="tx1"/>
+                </a:solidFill>
+              </a:rPr>
+              <a:t>mailbox / Teams presence</a:t>
+            </a:r>
+            <a:endParaRPr lang="en-US" sz="1200" dirty="0"/>
+          </a:p>
+        </p:txBody>
+      </p:sp>
+      <p:sp>
+        <p:nvSpPr>
+          <p:cNvPr id="25" name="Text 22"/>
           <p:cNvSpPr txBox="1"/>
           <p:nvPr/>
         </p:nvSpPr>
         <p:spPr>
           <a:xfrm>
-            <a:off x="2926080" y="3511296"/>
-            <a:ext cx="5577840" cy="960120"/>
+            <a:off x="4718304" y="3840480"/>
+            <a:ext cx="3968496" cy="731520"/>
           </a:xfrm>
           <a:prstGeom prst="rect">
             <a:avLst/>
@@ -5000,14 +5664,25 @@
               <a:buNone/>
             </a:pPr>
             <a:r>
-              <a:rPr lang="en-US" sz="1300" dirty="0">
+              <a:rPr lang="en-US" sz="1200" b="1" dirty="0">
+                <a:solidFill>
+                  <a:schemeClr val="tx2"/>
+                </a:solidFill>
+              </a:rPr>
+              <a:t>Think of it as: </a:t>
+            </a:r>
+            <a:pPr indent="0" marL="0">
+              <a:buNone/>
+            </a:pPr>
+            <a:r>
+              <a:rPr lang="en-US" sz="1200" dirty="0">
                 <a:solidFill>
                   <a:schemeClr val="tx1"/>
                 </a:solidFill>
               </a:rPr>
-              <a:t>The old Entra agent registry and its API were retired in 2026. Re-register any custom agents with the new Agent 365 registration Graph API.</a:t>
-            </a:r>
-            <a:endParaRPr lang="en-US" sz="1300" dirty="0"/>
+              <a:t>blueprint ≈ app registration, agent identity ≈ enterprise app – but one blueprint can create many agents.</a:t>
+            </a:r>
+            <a:endParaRPr lang="en-US" sz="1200" dirty="0"/>
           </a:p>
         </p:txBody>
       </p:sp>
@@ -5084,6 +5759,42 @@
       <p:sp>
         <p:nvSpPr>
           <p:cNvPr id="2" name="Text 0"/>
+          <p:cNvSpPr txBox="1"/>
+          <p:nvPr/>
+        </p:nvSpPr>
+        <p:spPr>
+          <a:xfrm>
+            <a:off x="457200" y="274320"/>
+            <a:ext cx="3657600" cy="201168"/>
+          </a:xfrm>
+          <a:prstGeom prst="rect">
+            <a:avLst/>
+          </a:prstGeom>
+          <a:noFill/>
+          <a:ln/>
+        </p:spPr>
+        <p:txBody>
+          <a:bodyPr wrap="square" lIns="0" tIns="0" rIns="0" bIns="0" rtlCol="0" anchor="ctr"/>
+          <a:lstStyle/>
+          <a:p>
+            <a:pPr indent="0" marL="0">
+              <a:buNone/>
+            </a:pPr>
+            <a:r>
+              <a:rPr lang="en-US" sz="1000" b="1" spc="200" kern="0" dirty="0">
+                <a:solidFill>
+                  <a:schemeClr val="accent1"/>
+                </a:solidFill>
+              </a:rPr>
+              <a:t>BLUEPRINTS  ·  HOW IT FITS</a:t>
+            </a:r>
+            <a:endParaRPr lang="en-US" sz="1000" dirty="0"/>
+          </a:p>
+        </p:txBody>
+      </p:sp>
+      <p:sp>
+        <p:nvSpPr>
+          <p:cNvPr id="3" name="Text 0"/>
           <p:cNvSpPr/>
           <p:nvPr>
             <p:ph idx="100" type="title" hasCustomPrompt="1"/>
@@ -5113,7 +5824,7 @@
                   <a:schemeClr val="tx2"/>
                 </a:solidFill>
               </a:rPr>
-              <a:t>Our roadmap: from visibility to value</a:t>
+              <a:t>Identity vs inventory: Agent ID and the registry</a:t>
             </a:r>
             <a:endParaRPr lang="en-US" sz="2800" dirty="0"/>
           </a:p>
@@ -5121,18 +5832,232 @@
       </p:sp>
       <p:sp>
         <p:nvSpPr>
-          <p:cNvPr id="3" name="Phase 1"/>
+          <p:cNvPr id="4" name="Fit card 1"/>
           <p:cNvSpPr/>
           <p:nvPr/>
         </p:nvSpPr>
         <p:spPr>
           <a:xfrm>
-            <a:off x="457200" y="1325880"/>
-            <a:ext cx="1920240" cy="3200400"/>
+            <a:off x="457200" y="1280160"/>
+            <a:ext cx="3749040" cy="2423160"/>
           </a:xfrm>
           <a:prstGeom prst="roundRect">
             <a:avLst>
-              <a:gd name="adj" fmla="val 5714"/>
+              <a:gd name="adj" fmla="val 4528"/>
+            </a:avLst>
+          </a:prstGeom>
+          <a:solidFill>
+            <a:schemeClr val="tx2"/>
+          </a:solidFill>
+          <a:ln/>
+        </p:spPr>
+      </p:sp>
+      <p:sp>
+        <p:nvSpPr>
+          <p:cNvPr id="5" name="Fit icon bg 1"/>
+          <p:cNvSpPr/>
+          <p:nvPr/>
+        </p:nvSpPr>
+        <p:spPr>
+          <a:xfrm>
+            <a:off x="685800" y="1463040"/>
+            <a:ext cx="502920" cy="502920"/>
+          </a:xfrm>
+          <a:prstGeom prst="ellipse">
+            <a:avLst/>
+          </a:prstGeom>
+          <a:solidFill>
+            <a:schemeClr val="accent5"/>
+          </a:solidFill>
+          <a:ln/>
+        </p:spPr>
+      </p:sp>
+      <p:pic>
+        <p:nvPicPr>
+          <p:cNvPr id="6" name="Image 0" descr="Entra Agent ID">    </p:cNvPr>
+          <p:cNvPicPr>
+            <a:picLocks noChangeAspect="1"/>
+          </p:cNvPicPr>
+          <p:nvPr/>
+        </p:nvPicPr>
+        <p:blipFill>
+          <a:blip r:embed="rId1"/>
+          <a:stretch>
+            <a:fillRect/>
+          </a:stretch>
+        </p:blipFill>
+        <p:spPr>
+          <a:xfrm>
+            <a:off x="795528" y="1572768"/>
+            <a:ext cx="283464" cy="283464"/>
+          </a:xfrm>
+          <a:prstGeom prst="rect">
+            <a:avLst/>
+          </a:prstGeom>
+        </p:spPr>
+      </p:pic>
+      <p:sp>
+        <p:nvSpPr>
+          <p:cNvPr id="7" name="Text 4"/>
+          <p:cNvSpPr txBox="1"/>
+          <p:nvPr/>
+        </p:nvSpPr>
+        <p:spPr>
+          <a:xfrm>
+            <a:off x="1325880" y="1463040"/>
+            <a:ext cx="2743200" cy="502920"/>
+          </a:xfrm>
+          <a:prstGeom prst="rect">
+            <a:avLst/>
+          </a:prstGeom>
+          <a:noFill/>
+          <a:ln/>
+        </p:spPr>
+        <p:txBody>
+          <a:bodyPr wrap="square" lIns="0" tIns="0" rIns="0" bIns="0" rtlCol="0" anchor="ctr"/>
+          <a:lstStyle/>
+          <a:p>
+            <a:pPr indent="0" marL="0">
+              <a:buNone/>
+            </a:pPr>
+            <a:r>
+              <a:rPr lang="en-US" sz="1700" b="1" dirty="0">
+                <a:solidFill>
+                  <a:schemeClr val="bg1"/>
+                </a:solidFill>
+              </a:rPr>
+              <a:t>Entra Agent ID</a:t>
+            </a:r>
+            <a:endParaRPr lang="en-US" sz="1700" dirty="0"/>
+          </a:p>
+        </p:txBody>
+      </p:sp>
+      <p:sp>
+        <p:nvSpPr>
+          <p:cNvPr id="8" name="Text 5"/>
+          <p:cNvSpPr txBox="1"/>
+          <p:nvPr/>
+        </p:nvSpPr>
+        <p:spPr>
+          <a:xfrm>
+            <a:off x="685800" y="2103120"/>
+            <a:ext cx="3337560" cy="411480"/>
+          </a:xfrm>
+          <a:prstGeom prst="rect">
+            <a:avLst/>
+          </a:prstGeom>
+          <a:noFill/>
+          <a:ln/>
+        </p:spPr>
+        <p:txBody>
+          <a:bodyPr wrap="square" lIns="0" tIns="0" rIns="0" bIns="0" rtlCol="0" anchor="t"/>
+          <a:lstStyle/>
+          <a:p>
+            <a:pPr indent="0" marL="0">
+              <a:buNone/>
+            </a:pPr>
+            <a:r>
+              <a:rPr lang="en-US" sz="1300" i="1" dirty="0">
+                <a:solidFill>
+                  <a:schemeClr val="bg1"/>
+                </a:solidFill>
+              </a:rPr>
+              <a:t>Who is this agent and what can it access?</a:t>
+            </a:r>
+            <a:endParaRPr lang="en-US" sz="1300" dirty="0"/>
+          </a:p>
+        </p:txBody>
+      </p:sp>
+      <p:sp>
+        <p:nvSpPr>
+          <p:cNvPr id="9" name="Text 6"/>
+          <p:cNvSpPr txBox="1"/>
+          <p:nvPr/>
+        </p:nvSpPr>
+        <p:spPr>
+          <a:xfrm>
+            <a:off x="685800" y="2606040"/>
+            <a:ext cx="3383280" cy="1005840"/>
+          </a:xfrm>
+          <a:prstGeom prst="rect">
+            <a:avLst/>
+          </a:prstGeom>
+          <a:noFill/>
+          <a:ln/>
+        </p:spPr>
+        <p:txBody>
+          <a:bodyPr wrap="square" lIns="0" tIns="0" rIns="0" bIns="0" rtlCol="0" anchor="t"/>
+          <a:lstStyle/>
+          <a:p>
+            <a:pPr marL="342900" indent="-342900">
+              <a:spcAft>
+                <a:spcPts val="400"/>
+              </a:spcAft>
+              <a:buSzPct val="100000"/>
+              <a:buChar char="•"/>
+            </a:pPr>
+            <a:r>
+              <a:rPr lang="en-US" sz="1200" dirty="0">
+                <a:solidFill>
+                  <a:schemeClr val="bg2"/>
+                </a:solidFill>
+              </a:rPr>
+              <a:t>Blueprints, agent identities, agent users</a:t>
+            </a:r>
+            <a:endParaRPr lang="en-US" sz="1200" dirty="0"/>
+          </a:p>
+          <a:p>
+            <a:pPr marL="342900" indent="-342900">
+              <a:spcAft>
+                <a:spcPts val="400"/>
+              </a:spcAft>
+              <a:buSzPct val="100000"/>
+              <a:buChar char="•"/>
+            </a:pPr>
+            <a:r>
+              <a:rPr lang="en-US" sz="1200" dirty="0">
+                <a:solidFill>
+                  <a:schemeClr val="bg2"/>
+                </a:solidFill>
+              </a:rPr>
+              <a:t>Permissions, credentials, Conditional Access, risk</a:t>
+            </a:r>
+            <a:endParaRPr lang="en-US" sz="1200" dirty="0"/>
+          </a:p>
+          <a:p>
+            <a:pPr marL="342900" indent="-342900">
+              <a:spcAft>
+                <a:spcPts val="400"/>
+              </a:spcAft>
+              <a:buSzPct val="100000"/>
+              <a:buChar char="•"/>
+            </a:pPr>
+            <a:r>
+              <a:rPr lang="en-US" sz="1200" dirty="0">
+                <a:solidFill>
+                  <a:schemeClr val="bg2"/>
+                </a:solidFill>
+              </a:rPr>
+              <a:t>Entra admin center › Agent ID</a:t>
+            </a:r>
+            <a:endParaRPr lang="en-US" sz="1200" dirty="0"/>
+          </a:p>
+        </p:txBody>
+      </p:sp>
+      <p:sp>
+        <p:nvSpPr>
+          <p:cNvPr id="10" name="Fit card 2"/>
+          <p:cNvSpPr/>
+          <p:nvPr/>
+        </p:nvSpPr>
+        <p:spPr>
+          <a:xfrm>
+            <a:off x="4937760" y="1280160"/>
+            <a:ext cx="3749040" cy="2423160"/>
+          </a:xfrm>
+          <a:prstGeom prst="roundRect">
+            <a:avLst>
+              <a:gd name="adj" fmla="val 4528"/>
             </a:avLst>
           </a:prstGeom>
           <a:solidFill>
@@ -5143,14 +6068,14 @@
       </p:sp>
       <p:sp>
         <p:nvSpPr>
-          <p:cNvPr id="4" name="Phase 1 badge"/>
+          <p:cNvPr id="11" name="Fit icon bg 2"/>
           <p:cNvSpPr/>
           <p:nvPr/>
         </p:nvSpPr>
         <p:spPr>
           <a:xfrm>
-            <a:off x="640080" y="1508760"/>
-            <a:ext cx="548640" cy="548640"/>
+            <a:off x="5166360" y="1463040"/>
+            <a:ext cx="502920" cy="502920"/>
           </a:xfrm>
           <a:prstGeom prst="ellipse">
             <a:avLst/>
@@ -5161,16 +6086,40 @@
           <a:ln/>
         </p:spPr>
       </p:sp>
-      <p:sp>
-        <p:nvSpPr>
-          <p:cNvPr id="5" name="Text 3"/>
+      <p:pic>
+        <p:nvPicPr>
+          <p:cNvPr id="12" name="Image 1" descr="Agent 365 registry">    </p:cNvPr>
+          <p:cNvPicPr>
+            <a:picLocks noChangeAspect="1"/>
+          </p:cNvPicPr>
+          <p:nvPr/>
+        </p:nvPicPr>
+        <p:blipFill>
+          <a:blip r:embed="rId2"/>
+          <a:stretch>
+            <a:fillRect/>
+          </a:stretch>
+        </p:blipFill>
+        <p:spPr>
+          <a:xfrm>
+            <a:off x="5276088" y="1572768"/>
+            <a:ext cx="283464" cy="283464"/>
+          </a:xfrm>
+          <a:prstGeom prst="rect">
+            <a:avLst/>
+          </a:prstGeom>
+        </p:spPr>
+      </p:pic>
+      <p:sp>
+        <p:nvSpPr>
+          <p:cNvPr id="13" name="Text 9"/>
           <p:cNvSpPr txBox="1"/>
           <p:nvPr/>
         </p:nvSpPr>
         <p:spPr>
           <a:xfrm>
-            <a:off x="640080" y="1508760"/>
-            <a:ext cx="548640" cy="548640"/>
+            <a:off x="5806440" y="1463040"/>
+            <a:ext cx="2743200" cy="502920"/>
           </a:xfrm>
           <a:prstGeom prst="rect">
             <a:avLst/>
@@ -5182,67 +6131,67 @@
           <a:bodyPr wrap="square" lIns="0" tIns="0" rIns="0" bIns="0" rtlCol="0" anchor="ctr"/>
           <a:lstStyle/>
           <a:p>
-            <a:pPr algn="ctr" indent="0" marL="0">
-              <a:buNone/>
-            </a:pPr>
-            <a:r>
-              <a:rPr lang="en-US" sz="2000" b="1" dirty="0">
-                <a:solidFill>
-                  <a:schemeClr val="bg1"/>
-                </a:solidFill>
-              </a:rPr>
-              <a:t>1</a:t>
-            </a:r>
-            <a:endParaRPr lang="en-US" sz="2000" dirty="0"/>
-          </a:p>
-        </p:txBody>
-      </p:sp>
-      <p:sp>
-        <p:nvSpPr>
-          <p:cNvPr id="6" name="Text 4"/>
+            <a:pPr indent="0" marL="0">
+              <a:buNone/>
+            </a:pPr>
+            <a:r>
+              <a:rPr lang="en-US" sz="1700" b="1" dirty="0">
+                <a:solidFill>
+                  <a:schemeClr val="tx2"/>
+                </a:solidFill>
+              </a:rPr>
+              <a:t>Agent 365 registry</a:t>
+            </a:r>
+            <a:endParaRPr lang="en-US" sz="1700" dirty="0"/>
+          </a:p>
+        </p:txBody>
+      </p:sp>
+      <p:sp>
+        <p:nvSpPr>
+          <p:cNvPr id="14" name="Text 10"/>
           <p:cNvSpPr txBox="1"/>
           <p:nvPr/>
         </p:nvSpPr>
         <p:spPr>
           <a:xfrm>
-            <a:off x="640080" y="2194560"/>
-            <a:ext cx="1645920" cy="365760"/>
-          </a:xfrm>
-          <a:prstGeom prst="rect">
-            <a:avLst/>
-          </a:prstGeom>
-          <a:noFill/>
-          <a:ln/>
-        </p:spPr>
-        <p:txBody>
-          <a:bodyPr wrap="square" lIns="0" tIns="0" rIns="0" bIns="0" rtlCol="0" anchor="ctr"/>
-          <a:lstStyle/>
-          <a:p>
-            <a:pPr indent="0" marL="0">
-              <a:buNone/>
-            </a:pPr>
-            <a:r>
-              <a:rPr lang="en-US" sz="1800" b="1" dirty="0">
+            <a:off x="5166360" y="2103120"/>
+            <a:ext cx="3337560" cy="411480"/>
+          </a:xfrm>
+          <a:prstGeom prst="rect">
+            <a:avLst/>
+          </a:prstGeom>
+          <a:noFill/>
+          <a:ln/>
+        </p:spPr>
+        <p:txBody>
+          <a:bodyPr wrap="square" lIns="0" tIns="0" rIns="0" bIns="0" rtlCol="0" anchor="t"/>
+          <a:lstStyle/>
+          <a:p>
+            <a:pPr indent="0" marL="0">
+              <a:buNone/>
+            </a:pPr>
+            <a:r>
+              <a:rPr lang="en-US" sz="1300" i="1" dirty="0">
                 <a:solidFill>
                   <a:schemeClr val="tx2"/>
                 </a:solidFill>
               </a:rPr>
-              <a:t>Discover</a:t>
-            </a:r>
-            <a:endParaRPr lang="en-US" sz="1800" dirty="0"/>
-          </a:p>
-        </p:txBody>
-      </p:sp>
-      <p:sp>
-        <p:nvSpPr>
-          <p:cNvPr id="7" name="Text 5"/>
+              <a:t>Which agents exist, who owns them, are they allowed?</a:t>
+            </a:r>
+            <a:endParaRPr lang="en-US" sz="1300" dirty="0"/>
+          </a:p>
+        </p:txBody>
+      </p:sp>
+      <p:sp>
+        <p:nvSpPr>
+          <p:cNvPr id="15" name="Text 11"/>
           <p:cNvSpPr txBox="1"/>
           <p:nvPr/>
         </p:nvSpPr>
         <p:spPr>
           <a:xfrm>
-            <a:off x="640080" y="2651760"/>
-            <a:ext cx="1645920" cy="1737360"/>
+            <a:off x="5166360" y="2606040"/>
+            <a:ext cx="3383280" cy="1005840"/>
           </a:xfrm>
           <a:prstGeom prst="rect">
             <a:avLst/>
@@ -5256,7 +6205,7 @@
           <a:p>
             <a:pPr marL="342900" indent="-342900">
               <a:spcAft>
-                <a:spcPts val="600"/>
+                <a:spcPts val="400"/>
               </a:spcAft>
               <a:buSzPct val="100000"/>
               <a:buChar char="•"/>
@@ -5267,14 +6216,14 @@
                   <a:schemeClr val="tx1"/>
                 </a:solidFill>
               </a:rPr>
-              <a:t>Review the Overview dashboard</a:t>
+              <a:t>Every agent – Copilot Studio, Microsoft, third-party</a:t>
             </a:r>
             <a:endParaRPr lang="en-US" sz="1200" dirty="0"/>
           </a:p>
           <a:p>
             <a:pPr marL="342900" indent="-342900">
               <a:spcAft>
-                <a:spcPts val="600"/>
+                <a:spcPts val="400"/>
               </a:spcAft>
               <a:buSzPct val="100000"/>
               <a:buChar char="•"/>
@@ -5285,14 +6234,14 @@
                   <a:schemeClr val="tx1"/>
                 </a:solidFill>
               </a:rPr>
-              <a:t>Inventory agents in the registry</a:t>
+              <a:t>Owners, status, block / allow, usage</a:t>
             </a:r>
             <a:endParaRPr lang="en-US" sz="1200" dirty="0"/>
           </a:p>
           <a:p>
             <a:pPr marL="342900" indent="-342900">
               <a:spcAft>
-                <a:spcPts val="600"/>
+                <a:spcPts val="400"/>
               </a:spcAft>
               <a:buSzPct val="100000"/>
               <a:buChar char="•"/>
@@ -5303,7 +6252,7 @@
                   <a:schemeClr val="tx1"/>
                 </a:solidFill>
               </a:rPr>
-              <a:t>Explore the Agent Map</a:t>
+              <a:t>M365 admin center › Agent 365 › Agent registry</a:t>
             </a:r>
             <a:endParaRPr lang="en-US" sz="1200" dirty="0"/>
           </a:p>
@@ -5311,38 +6260,67 @@
       </p:sp>
       <p:sp>
         <p:nvSpPr>
-          <p:cNvPr id="8" name="Arrow 1"/>
+          <p:cNvPr id="16" name="Link badge"/>
           <p:cNvSpPr/>
           <p:nvPr/>
         </p:nvSpPr>
         <p:spPr>
           <a:xfrm>
-            <a:off x="2395728" y="1645920"/>
-            <a:ext cx="146304" cy="274320"/>
-          </a:xfrm>
-          <a:prstGeom prst="chevron">
+            <a:off x="4270248" y="2194560"/>
+            <a:ext cx="603504" cy="603504"/>
+          </a:xfrm>
+          <a:prstGeom prst="ellipse">
             <a:avLst/>
           </a:prstGeom>
           <a:solidFill>
-            <a:schemeClr val="accent6"/>
+            <a:schemeClr val="accent2"/>
           </a:solidFill>
-          <a:ln/>
-        </p:spPr>
-      </p:sp>
-      <p:sp>
-        <p:nvSpPr>
-          <p:cNvPr id="9" name="Phase 2"/>
+          <a:ln w="25400">
+            <a:solidFill>
+              <a:schemeClr val="bg1"/>
+            </a:solidFill>
+            <a:prstDash val="solid"/>
+          </a:ln>
+        </p:spPr>
+      </p:sp>
+      <p:pic>
+        <p:nvPicPr>
+          <p:cNvPr id="17" name="Image 2" descr="Linked">    </p:cNvPr>
+          <p:cNvPicPr>
+            <a:picLocks noChangeAspect="1"/>
+          </p:cNvPicPr>
+          <p:nvPr/>
+        </p:nvPicPr>
+        <p:blipFill>
+          <a:blip r:embed="rId3"/>
+          <a:stretch>
+            <a:fillRect/>
+          </a:stretch>
+        </p:blipFill>
+        <p:spPr>
+          <a:xfrm>
+            <a:off x="4407408" y="2331720"/>
+            <a:ext cx="329184" cy="329184"/>
+          </a:xfrm>
+          <a:prstGeom prst="rect">
+            <a:avLst/>
+          </a:prstGeom>
+        </p:spPr>
+      </p:pic>
+      <p:sp>
+        <p:nvSpPr>
+          <p:cNvPr id="18" name="Link banner"/>
           <p:cNvSpPr/>
           <p:nvPr/>
         </p:nvSpPr>
         <p:spPr>
           <a:xfrm>
-            <a:off x="2560320" y="1325880"/>
-            <a:ext cx="1920240" cy="3200400"/>
+            <a:off x="457200" y="3886200"/>
+            <a:ext cx="8229600" cy="685800"/>
           </a:xfrm>
           <a:prstGeom prst="roundRect">
             <a:avLst>
-              <a:gd name="adj" fmla="val 5714"/>
+              <a:gd name="adj" fmla="val 13333"/>
             </a:avLst>
           </a:prstGeom>
           <a:solidFill>
@@ -5353,34 +6331,14 @@
       </p:sp>
       <p:sp>
         <p:nvSpPr>
-          <p:cNvPr id="10" name="Phase 2 badge"/>
-          <p:cNvSpPr/>
-          <p:nvPr/>
-        </p:nvSpPr>
-        <p:spPr>
-          <a:xfrm>
-            <a:off x="2743200" y="1508760"/>
-            <a:ext cx="548640" cy="548640"/>
-          </a:xfrm>
-          <a:prstGeom prst="ellipse">
-            <a:avLst/>
-          </a:prstGeom>
-          <a:solidFill>
-            <a:schemeClr val="accent5"/>
-          </a:solidFill>
-          <a:ln/>
-        </p:spPr>
-      </p:sp>
-      <p:sp>
-        <p:nvSpPr>
-          <p:cNvPr id="11" name="Text 9"/>
+          <p:cNvPr id="19" name="Text 14"/>
           <p:cNvSpPr txBox="1"/>
           <p:nvPr/>
         </p:nvSpPr>
         <p:spPr>
           <a:xfrm>
-            <a:off x="2743200" y="1508760"/>
-            <a:ext cx="548640" cy="548640"/>
+            <a:off x="685800" y="3886200"/>
+            <a:ext cx="7772400" cy="685800"/>
           </a:xfrm>
           <a:prstGeom prst="rect">
             <a:avLst/>
@@ -5392,550 +6350,29 @@
           <a:bodyPr wrap="square" lIns="0" tIns="0" rIns="0" bIns="0" rtlCol="0" anchor="ctr"/>
           <a:lstStyle/>
           <a:p>
-            <a:pPr algn="ctr" indent="0" marL="0">
-              <a:buNone/>
-            </a:pPr>
-            <a:r>
-              <a:rPr lang="en-US" sz="2000" b="1" dirty="0">
-                <a:solidFill>
-                  <a:schemeClr val="bg1"/>
-                </a:solidFill>
-              </a:rPr>
-              <a:t>2</a:t>
-            </a:r>
-            <a:endParaRPr lang="en-US" sz="2000" dirty="0"/>
-          </a:p>
-        </p:txBody>
-      </p:sp>
-      <p:sp>
-        <p:nvSpPr>
-          <p:cNvPr id="12" name="Text 10"/>
-          <p:cNvSpPr txBox="1"/>
-          <p:nvPr/>
-        </p:nvSpPr>
-        <p:spPr>
-          <a:xfrm>
-            <a:off x="2743200" y="2194560"/>
-            <a:ext cx="1645920" cy="365760"/>
-          </a:xfrm>
-          <a:prstGeom prst="rect">
-            <a:avLst/>
-          </a:prstGeom>
-          <a:noFill/>
-          <a:ln/>
-        </p:spPr>
-        <p:txBody>
-          <a:bodyPr wrap="square" lIns="0" tIns="0" rIns="0" bIns="0" rtlCol="0" anchor="ctr"/>
-          <a:lstStyle/>
-          <a:p>
-            <a:pPr indent="0" marL="0">
-              <a:buNone/>
-            </a:pPr>
-            <a:r>
-              <a:rPr lang="en-US" sz="1800" b="1" dirty="0">
+            <a:pPr indent="0" marL="0">
+              <a:buNone/>
+            </a:pPr>
+            <a:r>
+              <a:rPr lang="en-US" sz="1300" b="1" dirty="0">
                 <a:solidFill>
                   <a:schemeClr val="tx2"/>
                 </a:solidFill>
               </a:rPr>
-              <a:t>Govern</a:t>
-            </a:r>
-            <a:endParaRPr lang="en-US" sz="1800" dirty="0"/>
-          </a:p>
-        </p:txBody>
-      </p:sp>
-      <p:sp>
-        <p:nvSpPr>
-          <p:cNvPr id="13" name="Text 11"/>
-          <p:cNvSpPr txBox="1"/>
-          <p:nvPr/>
-        </p:nvSpPr>
-        <p:spPr>
-          <a:xfrm>
-            <a:off x="2743200" y="2651760"/>
-            <a:ext cx="1645920" cy="1737360"/>
-          </a:xfrm>
-          <a:prstGeom prst="rect">
-            <a:avLst/>
-          </a:prstGeom>
-          <a:noFill/>
-          <a:ln/>
-        </p:spPr>
-        <p:txBody>
-          <a:bodyPr wrap="square" lIns="0" tIns="0" rIns="0" bIns="0" rtlCol="0" anchor="t"/>
-          <a:lstStyle/>
-          <a:p>
-            <a:pPr marL="342900" indent="-342900">
-              <a:spcAft>
-                <a:spcPts val="600"/>
-              </a:spcAft>
-              <a:buSzPct val="100000"/>
-              <a:buChar char="•"/>
-            </a:pPr>
-            <a:r>
-              <a:rPr lang="en-US" sz="1200" dirty="0">
+              <a:t>Linked by ID: </a:t>
+            </a:r>
+            <a:pPr indent="0" marL="0">
+              <a:buNone/>
+            </a:pPr>
+            <a:r>
+              <a:rPr lang="en-US" sz="1300" dirty="0">
                 <a:solidFill>
                   <a:schemeClr val="tx1"/>
                 </a:solidFill>
               </a:rPr>
-              <a:t>Assign owners to ownerless agents</a:t>
-            </a:r>
-            <a:endParaRPr lang="en-US" sz="1200" dirty="0"/>
-          </a:p>
-          <a:p>
-            <a:pPr marL="342900" indent="-342900">
-              <a:spcAft>
-                <a:spcPts val="600"/>
-              </a:spcAft>
-              <a:buSzPct val="100000"/>
-              <a:buChar char="•"/>
-            </a:pPr>
-            <a:r>
-              <a:rPr lang="en-US" sz="1200" dirty="0">
-                <a:solidFill>
-                  <a:schemeClr val="tx1"/>
-                </a:solidFill>
-              </a:rPr>
-              <a:t>Set the approve / publish process</a:t>
-            </a:r>
-            <a:endParaRPr lang="en-US" sz="1200" dirty="0"/>
-          </a:p>
-          <a:p>
-            <a:pPr marL="342900" indent="-342900">
-              <a:spcAft>
-                <a:spcPts val="600"/>
-              </a:spcAft>
-              <a:buSzPct val="100000"/>
-              <a:buChar char="•"/>
-            </a:pPr>
-            <a:r>
-              <a:rPr lang="en-US" sz="1200" dirty="0">
-                <a:solidFill>
-                  <a:schemeClr val="tx1"/>
-                </a:solidFill>
-              </a:rPr>
-              <a:t>Turn on Entra Agent ID controls</a:t>
-            </a:r>
-            <a:endParaRPr lang="en-US" sz="1200" dirty="0"/>
-          </a:p>
-        </p:txBody>
-      </p:sp>
-      <p:sp>
-        <p:nvSpPr>
-          <p:cNvPr id="14" name="Arrow 2"/>
-          <p:cNvSpPr/>
-          <p:nvPr/>
-        </p:nvSpPr>
-        <p:spPr>
-          <a:xfrm>
-            <a:off x="4498848" y="1645920"/>
-            <a:ext cx="146304" cy="274320"/>
-          </a:xfrm>
-          <a:prstGeom prst="chevron">
-            <a:avLst/>
-          </a:prstGeom>
-          <a:solidFill>
-            <a:schemeClr val="accent6"/>
-          </a:solidFill>
-          <a:ln/>
-        </p:spPr>
-      </p:sp>
-      <p:sp>
-        <p:nvSpPr>
-          <p:cNvPr id="15" name="Phase 3"/>
-          <p:cNvSpPr/>
-          <p:nvPr/>
-        </p:nvSpPr>
-        <p:spPr>
-          <a:xfrm>
-            <a:off x="4663440" y="1325880"/>
-            <a:ext cx="1920240" cy="3200400"/>
-          </a:xfrm>
-          <a:prstGeom prst="roundRect">
-            <a:avLst>
-              <a:gd name="adj" fmla="val 5714"/>
-            </a:avLst>
-          </a:prstGeom>
-          <a:solidFill>
-            <a:schemeClr val="bg2"/>
-          </a:solidFill>
-          <a:ln/>
-        </p:spPr>
-      </p:sp>
-      <p:sp>
-        <p:nvSpPr>
-          <p:cNvPr id="16" name="Phase 3 badge"/>
-          <p:cNvSpPr/>
-          <p:nvPr/>
-        </p:nvSpPr>
-        <p:spPr>
-          <a:xfrm>
-            <a:off x="4846320" y="1508760"/>
-            <a:ext cx="548640" cy="548640"/>
-          </a:xfrm>
-          <a:prstGeom prst="ellipse">
-            <a:avLst/>
-          </a:prstGeom>
-          <a:solidFill>
-            <a:schemeClr val="accent4"/>
-          </a:solidFill>
-          <a:ln/>
-        </p:spPr>
-      </p:sp>
-      <p:sp>
-        <p:nvSpPr>
-          <p:cNvPr id="17" name="Text 15"/>
-          <p:cNvSpPr txBox="1"/>
-          <p:nvPr/>
-        </p:nvSpPr>
-        <p:spPr>
-          <a:xfrm>
-            <a:off x="4846320" y="1508760"/>
-            <a:ext cx="548640" cy="548640"/>
-          </a:xfrm>
-          <a:prstGeom prst="rect">
-            <a:avLst/>
-          </a:prstGeom>
-          <a:noFill/>
-          <a:ln/>
-        </p:spPr>
-        <p:txBody>
-          <a:bodyPr wrap="square" lIns="0" tIns="0" rIns="0" bIns="0" rtlCol="0" anchor="ctr"/>
-          <a:lstStyle/>
-          <a:p>
-            <a:pPr algn="ctr" indent="0" marL="0">
-              <a:buNone/>
-            </a:pPr>
-            <a:r>
-              <a:rPr lang="en-US" sz="2000" b="1" dirty="0">
-                <a:solidFill>
-                  <a:schemeClr val="bg1"/>
-                </a:solidFill>
-              </a:rPr>
-              <a:t>3</a:t>
-            </a:r>
-            <a:endParaRPr lang="en-US" sz="2000" dirty="0"/>
-          </a:p>
-        </p:txBody>
-      </p:sp>
-      <p:sp>
-        <p:nvSpPr>
-          <p:cNvPr id="18" name="Text 16"/>
-          <p:cNvSpPr txBox="1"/>
-          <p:nvPr/>
-        </p:nvSpPr>
-        <p:spPr>
-          <a:xfrm>
-            <a:off x="4846320" y="2194560"/>
-            <a:ext cx="1645920" cy="365760"/>
-          </a:xfrm>
-          <a:prstGeom prst="rect">
-            <a:avLst/>
-          </a:prstGeom>
-          <a:noFill/>
-          <a:ln/>
-        </p:spPr>
-        <p:txBody>
-          <a:bodyPr wrap="square" lIns="0" tIns="0" rIns="0" bIns="0" rtlCol="0" anchor="ctr"/>
-          <a:lstStyle/>
-          <a:p>
-            <a:pPr indent="0" marL="0">
-              <a:buNone/>
-            </a:pPr>
-            <a:r>
-              <a:rPr lang="en-US" sz="1800" b="1" dirty="0">
-                <a:solidFill>
-                  <a:schemeClr val="tx2"/>
-                </a:solidFill>
-              </a:rPr>
-              <a:t>Protect</a:t>
-            </a:r>
-            <a:endParaRPr lang="en-US" sz="1800" dirty="0"/>
-          </a:p>
-        </p:txBody>
-      </p:sp>
-      <p:sp>
-        <p:nvSpPr>
-          <p:cNvPr id="19" name="Text 17"/>
-          <p:cNvSpPr txBox="1"/>
-          <p:nvPr/>
-        </p:nvSpPr>
-        <p:spPr>
-          <a:xfrm>
-            <a:off x="4846320" y="2651760"/>
-            <a:ext cx="1645920" cy="1737360"/>
-          </a:xfrm>
-          <a:prstGeom prst="rect">
-            <a:avLst/>
-          </a:prstGeom>
-          <a:noFill/>
-          <a:ln/>
-        </p:spPr>
-        <p:txBody>
-          <a:bodyPr wrap="square" lIns="0" tIns="0" rIns="0" bIns="0" rtlCol="0" anchor="t"/>
-          <a:lstStyle/>
-          <a:p>
-            <a:pPr marL="342900" indent="-342900">
-              <a:spcAft>
-                <a:spcPts val="600"/>
-              </a:spcAft>
-              <a:buSzPct val="100000"/>
-              <a:buChar char="•"/>
-            </a:pPr>
-            <a:r>
-              <a:rPr lang="en-US" sz="1200" dirty="0">
-                <a:solidFill>
-                  <a:schemeClr val="tx1"/>
-                </a:solidFill>
-              </a:rPr>
-              <a:t>Extend Purview labels, DLP and audit</a:t>
-            </a:r>
-            <a:endParaRPr lang="en-US" sz="1200" dirty="0"/>
-          </a:p>
-          <a:p>
-            <a:pPr marL="342900" indent="-342900">
-              <a:spcAft>
-                <a:spcPts val="600"/>
-              </a:spcAft>
-              <a:buSzPct val="100000"/>
-              <a:buChar char="•"/>
-            </a:pPr>
-            <a:r>
-              <a:rPr lang="en-US" sz="1200" dirty="0">
-                <a:solidFill>
-                  <a:schemeClr val="tx1"/>
-                </a:solidFill>
-              </a:rPr>
-              <a:t>Enable Defender for agents</a:t>
-            </a:r>
-            <a:endParaRPr lang="en-US" sz="1200" dirty="0"/>
-          </a:p>
-          <a:p>
-            <a:pPr marL="342900" indent="-342900">
-              <a:spcAft>
-                <a:spcPts val="600"/>
-              </a:spcAft>
-              <a:buSzPct val="100000"/>
-              <a:buChar char="•"/>
-            </a:pPr>
-            <a:r>
-              <a:rPr lang="en-US" sz="1200" dirty="0">
-                <a:solidFill>
-                  <a:schemeClr val="tx1"/>
-                </a:solidFill>
-              </a:rPr>
-              <a:t>Add agents to SOC playbooks</a:t>
-            </a:r>
-            <a:endParaRPr lang="en-US" sz="1200" dirty="0"/>
-          </a:p>
-        </p:txBody>
-      </p:sp>
-      <p:sp>
-        <p:nvSpPr>
-          <p:cNvPr id="20" name="Arrow 3"/>
-          <p:cNvSpPr/>
-          <p:nvPr/>
-        </p:nvSpPr>
-        <p:spPr>
-          <a:xfrm>
-            <a:off x="6601968" y="1645920"/>
-            <a:ext cx="146304" cy="274320"/>
-          </a:xfrm>
-          <a:prstGeom prst="chevron">
-            <a:avLst/>
-          </a:prstGeom>
-          <a:solidFill>
-            <a:schemeClr val="accent6"/>
-          </a:solidFill>
-          <a:ln/>
-        </p:spPr>
-      </p:sp>
-      <p:sp>
-        <p:nvSpPr>
-          <p:cNvPr id="21" name="Phase 4"/>
-          <p:cNvSpPr/>
-          <p:nvPr/>
-        </p:nvSpPr>
-        <p:spPr>
-          <a:xfrm>
-            <a:off x="6766560" y="1325880"/>
-            <a:ext cx="1920240" cy="3200400"/>
-          </a:xfrm>
-          <a:prstGeom prst="roundRect">
-            <a:avLst>
-              <a:gd name="adj" fmla="val 5714"/>
-            </a:avLst>
-          </a:prstGeom>
-          <a:solidFill>
-            <a:schemeClr val="bg2"/>
-          </a:solidFill>
-          <a:ln/>
-        </p:spPr>
-      </p:sp>
-      <p:sp>
-        <p:nvSpPr>
-          <p:cNvPr id="22" name="Phase 4 badge"/>
-          <p:cNvSpPr/>
-          <p:nvPr/>
-        </p:nvSpPr>
-        <p:spPr>
-          <a:xfrm>
-            <a:off x="6949440" y="1508760"/>
-            <a:ext cx="548640" cy="548640"/>
-          </a:xfrm>
-          <a:prstGeom prst="ellipse">
-            <a:avLst/>
-          </a:prstGeom>
-          <a:solidFill>
-            <a:schemeClr val="accent2"/>
-          </a:solidFill>
-          <a:ln/>
-        </p:spPr>
-      </p:sp>
-      <p:sp>
-        <p:nvSpPr>
-          <p:cNvPr id="23" name="Text 21"/>
-          <p:cNvSpPr txBox="1"/>
-          <p:nvPr/>
-        </p:nvSpPr>
-        <p:spPr>
-          <a:xfrm>
-            <a:off x="6949440" y="1508760"/>
-            <a:ext cx="548640" cy="548640"/>
-          </a:xfrm>
-          <a:prstGeom prst="rect">
-            <a:avLst/>
-          </a:prstGeom>
-          <a:noFill/>
-          <a:ln/>
-        </p:spPr>
-        <p:txBody>
-          <a:bodyPr wrap="square" lIns="0" tIns="0" rIns="0" bIns="0" rtlCol="0" anchor="ctr"/>
-          <a:lstStyle/>
-          <a:p>
-            <a:pPr algn="ctr" indent="0" marL="0">
-              <a:buNone/>
-            </a:pPr>
-            <a:r>
-              <a:rPr lang="en-US" sz="2000" b="1" dirty="0">
-                <a:solidFill>
-                  <a:schemeClr val="bg1"/>
-                </a:solidFill>
-              </a:rPr>
-              <a:t>4</a:t>
-            </a:r>
-            <a:endParaRPr lang="en-US" sz="2000" dirty="0"/>
-          </a:p>
-        </p:txBody>
-      </p:sp>
-      <p:sp>
-        <p:nvSpPr>
-          <p:cNvPr id="24" name="Text 22"/>
-          <p:cNvSpPr txBox="1"/>
-          <p:nvPr/>
-        </p:nvSpPr>
-        <p:spPr>
-          <a:xfrm>
-            <a:off x="6949440" y="2194560"/>
-            <a:ext cx="1645920" cy="365760"/>
-          </a:xfrm>
-          <a:prstGeom prst="rect">
-            <a:avLst/>
-          </a:prstGeom>
-          <a:noFill/>
-          <a:ln/>
-        </p:spPr>
-        <p:txBody>
-          <a:bodyPr wrap="square" lIns="0" tIns="0" rIns="0" bIns="0" rtlCol="0" anchor="ctr"/>
-          <a:lstStyle/>
-          <a:p>
-            <a:pPr indent="0" marL="0">
-              <a:buNone/>
-            </a:pPr>
-            <a:r>
-              <a:rPr lang="en-US" sz="1800" b="1" dirty="0">
-                <a:solidFill>
-                  <a:schemeClr val="tx2"/>
-                </a:solidFill>
-              </a:rPr>
-              <a:t>Optimise</a:t>
-            </a:r>
-            <a:endParaRPr lang="en-US" sz="1800" dirty="0"/>
-          </a:p>
-        </p:txBody>
-      </p:sp>
-      <p:sp>
-        <p:nvSpPr>
-          <p:cNvPr id="25" name="Text 23"/>
-          <p:cNvSpPr txBox="1"/>
-          <p:nvPr/>
-        </p:nvSpPr>
-        <p:spPr>
-          <a:xfrm>
-            <a:off x="6949440" y="2651760"/>
-            <a:ext cx="1645920" cy="1737360"/>
-          </a:xfrm>
-          <a:prstGeom prst="rect">
-            <a:avLst/>
-          </a:prstGeom>
-          <a:noFill/>
-          <a:ln/>
-        </p:spPr>
-        <p:txBody>
-          <a:bodyPr wrap="square" lIns="0" tIns="0" rIns="0" bIns="0" rtlCol="0" anchor="t"/>
-          <a:lstStyle/>
-          <a:p>
-            <a:pPr marL="342900" indent="-342900">
-              <a:spcAft>
-                <a:spcPts val="600"/>
-              </a:spcAft>
-              <a:buSzPct val="100000"/>
-              <a:buChar char="•"/>
-            </a:pPr>
-            <a:r>
-              <a:rPr lang="en-US" sz="1200" dirty="0">
-                <a:solidFill>
-                  <a:schemeClr val="tx1"/>
-                </a:solidFill>
-              </a:rPr>
-              <a:t>Track usage and errors</a:t>
-            </a:r>
-            <a:endParaRPr lang="en-US" sz="1200" dirty="0"/>
-          </a:p>
-          <a:p>
-            <a:pPr marL="342900" indent="-342900">
-              <a:spcAft>
-                <a:spcPts val="600"/>
-              </a:spcAft>
-              <a:buSzPct val="100000"/>
-              <a:buChar char="•"/>
-            </a:pPr>
-            <a:r>
-              <a:rPr lang="en-US" sz="1200" dirty="0">
-                <a:solidFill>
-                  <a:schemeClr val="tx1"/>
-                </a:solidFill>
-              </a:rPr>
-              <a:t>Retire unused agents</a:t>
-            </a:r>
-            <a:endParaRPr lang="en-US" sz="1200" dirty="0"/>
-          </a:p>
-          <a:p>
-            <a:pPr marL="342900" indent="-342900">
-              <a:spcAft>
-                <a:spcPts val="600"/>
-              </a:spcAft>
-              <a:buSzPct val="100000"/>
-              <a:buChar char="•"/>
-            </a:pPr>
-            <a:r>
-              <a:rPr lang="en-US" sz="1200" dirty="0">
-                <a:solidFill>
-                  <a:schemeClr val="tx1"/>
-                </a:solidFill>
-              </a:rPr>
-              <a:t>Build with the SDK and MCP tools</a:t>
-            </a:r>
-            <a:endParaRPr lang="en-US" sz="1200" dirty="0"/>
+              <a:t>each registry entry records its blueprint ID, agent identity ID and agent user ID. Some agents have no Entra identity yet – our tenant today has 0 blueprints.</a:t>
+            </a:r>
+            <a:endParaRPr lang="en-US" sz="1300" dirty="0"/>
           </a:p>
         </p:txBody>
       </p:sp>
@@ -5995,6 +6432,3064 @@
 <file path=ppt/slides/slide15.xml><?xml version="1.0" encoding="utf-8"?>
 <p:sld xmlns:a="http://schemas.openxmlformats.org/drawingml/2006/main" xmlns:r="http://schemas.openxmlformats.org/officeDocument/2006/relationships" xmlns:p="http://schemas.openxmlformats.org/presentationml/2006/main">
   <p:cSld name="Slide 15">
+    <p:spTree>
+      <p:nvGrpSpPr>
+        <p:cNvPr id="1" name=""/>
+        <p:cNvGrpSpPr/>
+        <p:nvPr/>
+      </p:nvGrpSpPr>
+      <p:grpSpPr>
+        <a:xfrm>
+          <a:off x="0" y="0"/>
+          <a:ext cx="0" cy="0"/>
+          <a:chOff x="0" y="0"/>
+          <a:chExt cx="0" cy="0"/>
+        </a:xfrm>
+      </p:grpSpPr>
+      <p:sp>
+        <p:nvSpPr>
+          <p:cNvPr id="2" name="Text 0"/>
+          <p:cNvSpPr txBox="1"/>
+          <p:nvPr/>
+        </p:nvSpPr>
+        <p:spPr>
+          <a:xfrm>
+            <a:off x="457200" y="274320"/>
+            <a:ext cx="3657600" cy="201168"/>
+          </a:xfrm>
+          <a:prstGeom prst="rect">
+            <a:avLst/>
+          </a:prstGeom>
+          <a:noFill/>
+          <a:ln/>
+        </p:spPr>
+        <p:txBody>
+          <a:bodyPr wrap="square" lIns="0" tIns="0" rIns="0" bIns="0" rtlCol="0" anchor="ctr"/>
+          <a:lstStyle/>
+          <a:p>
+            <a:pPr indent="0" marL="0">
+              <a:buNone/>
+            </a:pPr>
+            <a:r>
+              <a:rPr lang="en-US" sz="1000" b="1" spc="200" kern="0" dirty="0">
+                <a:solidFill>
+                  <a:schemeClr val="accent1"/>
+                </a:solidFill>
+              </a:rPr>
+              <a:t>BLUEPRINTS  ·  CONTROLS</a:t>
+            </a:r>
+            <a:endParaRPr lang="en-US" sz="1000" dirty="0"/>
+          </a:p>
+        </p:txBody>
+      </p:sp>
+      <p:sp>
+        <p:nvSpPr>
+          <p:cNvPr id="3" name="Text 0"/>
+          <p:cNvSpPr/>
+          <p:nvPr>
+            <p:ph idx="100" type="title" hasCustomPrompt="1"/>
+          </p:nvPr>
+        </p:nvSpPr>
+        <p:spPr>
+          <a:xfrm>
+            <a:off x="457200" y="502920"/>
+            <a:ext cx="8229600" cy="594360"/>
+          </a:xfrm>
+          <a:prstGeom prst="rect">
+            <a:avLst/>
+          </a:prstGeom>
+          <a:noFill/>
+          <a:ln/>
+        </p:spPr>
+        <p:txBody>
+          <a:bodyPr wrap="square" lIns="0" tIns="0" rIns="0" bIns="0" rtlCol="0" anchor="ctr"/>
+          <a:lstStyle/>
+          <a:p>
+            <a:pPr algn="l" indent="0" marL="0">
+              <a:buNone/>
+            </a:pPr>
+            <a:r>
+              <a:rPr lang="en-US" sz="2800" b="1" dirty="0">
+                <a:solidFill>
+                  <a:schemeClr val="tx2"/>
+                </a:solidFill>
+              </a:rPr>
+              <a:t>What lives on the blueprint, and why it matters</a:t>
+            </a:r>
+            <a:endParaRPr lang="en-US" sz="2800" dirty="0"/>
+          </a:p>
+        </p:txBody>
+      </p:sp>
+      <p:sp>
+        <p:nvSpPr>
+          <p:cNvPr id="4" name="Control card 1"/>
+          <p:cNvSpPr/>
+          <p:nvPr/>
+        </p:nvSpPr>
+        <p:spPr>
+          <a:xfrm>
+            <a:off x="457200" y="1280160"/>
+            <a:ext cx="4023360" cy="1463040"/>
+          </a:xfrm>
+          <a:prstGeom prst="roundRect">
+            <a:avLst>
+              <a:gd name="adj" fmla="val 7500"/>
+            </a:avLst>
+          </a:prstGeom>
+          <a:solidFill>
+            <a:schemeClr val="bg2"/>
+          </a:solidFill>
+          <a:ln/>
+        </p:spPr>
+      </p:sp>
+      <p:sp>
+        <p:nvSpPr>
+          <p:cNvPr id="5" name="Control icon bg 1"/>
+          <p:cNvSpPr/>
+          <p:nvPr/>
+        </p:nvSpPr>
+        <p:spPr>
+          <a:xfrm>
+            <a:off x="685800" y="1508760"/>
+            <a:ext cx="548640" cy="548640"/>
+          </a:xfrm>
+          <a:prstGeom prst="ellipse">
+            <a:avLst/>
+          </a:prstGeom>
+          <a:solidFill>
+            <a:schemeClr val="accent4"/>
+          </a:solidFill>
+          <a:ln/>
+        </p:spPr>
+      </p:sp>
+      <p:pic>
+        <p:nvPicPr>
+          <p:cNvPr id="6" name="Image 0" descr="Inheritable permissions">    </p:cNvPr>
+          <p:cNvPicPr>
+            <a:picLocks noChangeAspect="1"/>
+          </p:cNvPicPr>
+          <p:nvPr/>
+        </p:nvPicPr>
+        <p:blipFill>
+          <a:blip r:embed="rId1"/>
+          <a:stretch>
+            <a:fillRect/>
+          </a:stretch>
+        </p:blipFill>
+        <p:spPr>
+          <a:xfrm>
+            <a:off x="804672" y="1627632"/>
+            <a:ext cx="310896" cy="310896"/>
+          </a:xfrm>
+          <a:prstGeom prst="rect">
+            <a:avLst/>
+          </a:prstGeom>
+        </p:spPr>
+      </p:pic>
+      <p:sp>
+        <p:nvSpPr>
+          <p:cNvPr id="7" name="Text 4"/>
+          <p:cNvSpPr txBox="1"/>
+          <p:nvPr/>
+        </p:nvSpPr>
+        <p:spPr>
+          <a:xfrm>
+            <a:off x="1417320" y="1463040"/>
+            <a:ext cx="2926080" cy="365760"/>
+          </a:xfrm>
+          <a:prstGeom prst="rect">
+            <a:avLst/>
+          </a:prstGeom>
+          <a:noFill/>
+          <a:ln/>
+        </p:spPr>
+        <p:txBody>
+          <a:bodyPr wrap="square" lIns="0" tIns="0" rIns="0" bIns="0" rtlCol="0" anchor="ctr"/>
+          <a:lstStyle/>
+          <a:p>
+            <a:pPr indent="0" marL="0">
+              <a:buNone/>
+            </a:pPr>
+            <a:r>
+              <a:rPr lang="en-US" sz="1600" b="1" dirty="0">
+                <a:solidFill>
+                  <a:schemeClr val="tx2"/>
+                </a:solidFill>
+              </a:rPr>
+              <a:t>Inheritable permissions</a:t>
+            </a:r>
+            <a:endParaRPr lang="en-US" sz="1600" dirty="0"/>
+          </a:p>
+        </p:txBody>
+      </p:sp>
+      <p:sp>
+        <p:nvSpPr>
+          <p:cNvPr id="8" name="Text 5"/>
+          <p:cNvSpPr txBox="1"/>
+          <p:nvPr/>
+        </p:nvSpPr>
+        <p:spPr>
+          <a:xfrm>
+            <a:off x="1417320" y="1847088"/>
+            <a:ext cx="2926080" cy="777240"/>
+          </a:xfrm>
+          <a:prstGeom prst="rect">
+            <a:avLst/>
+          </a:prstGeom>
+          <a:noFill/>
+          <a:ln/>
+        </p:spPr>
+        <p:txBody>
+          <a:bodyPr wrap="square" lIns="0" tIns="0" rIns="0" bIns="0" rtlCol="0" anchor="t"/>
+          <a:lstStyle/>
+          <a:p>
+            <a:pPr indent="0" marL="0">
+              <a:buNone/>
+            </a:pPr>
+            <a:r>
+              <a:rPr lang="en-US" sz="1200" dirty="0">
+                <a:solidFill>
+                  <a:schemeClr val="tx1"/>
+                </a:solidFill>
+              </a:rPr>
+              <a:t>Approve once and every agent from the blueprint gets it. Review like tenant-wide app consent.</a:t>
+            </a:r>
+            <a:endParaRPr lang="en-US" sz="1200" dirty="0"/>
+          </a:p>
+        </p:txBody>
+      </p:sp>
+      <p:sp>
+        <p:nvSpPr>
+          <p:cNvPr id="9" name="Control card 2"/>
+          <p:cNvSpPr/>
+          <p:nvPr/>
+        </p:nvSpPr>
+        <p:spPr>
+          <a:xfrm>
+            <a:off x="4663440" y="1280160"/>
+            <a:ext cx="4023360" cy="1463040"/>
+          </a:xfrm>
+          <a:prstGeom prst="roundRect">
+            <a:avLst>
+              <a:gd name="adj" fmla="val 7500"/>
+            </a:avLst>
+          </a:prstGeom>
+          <a:solidFill>
+            <a:schemeClr val="bg2"/>
+          </a:solidFill>
+          <a:ln/>
+        </p:spPr>
+      </p:sp>
+      <p:sp>
+        <p:nvSpPr>
+          <p:cNvPr id="10" name="Control icon bg 2"/>
+          <p:cNvSpPr/>
+          <p:nvPr/>
+        </p:nvSpPr>
+        <p:spPr>
+          <a:xfrm>
+            <a:off x="4892040" y="1508760"/>
+            <a:ext cx="548640" cy="548640"/>
+          </a:xfrm>
+          <a:prstGeom prst="ellipse">
+            <a:avLst/>
+          </a:prstGeom>
+          <a:solidFill>
+            <a:schemeClr val="accent3"/>
+          </a:solidFill>
+          <a:ln/>
+        </p:spPr>
+      </p:sp>
+      <p:pic>
+        <p:nvPicPr>
+          <p:cNvPr id="11" name="Image 1" descr="Credentials">    </p:cNvPr>
+          <p:cNvPicPr>
+            <a:picLocks noChangeAspect="1"/>
+          </p:cNvPicPr>
+          <p:nvPr/>
+        </p:nvPicPr>
+        <p:blipFill>
+          <a:blip r:embed="rId2"/>
+          <a:stretch>
+            <a:fillRect/>
+          </a:stretch>
+        </p:blipFill>
+        <p:spPr>
+          <a:xfrm>
+            <a:off x="5010912" y="1627632"/>
+            <a:ext cx="310896" cy="310896"/>
+          </a:xfrm>
+          <a:prstGeom prst="rect">
+            <a:avLst/>
+          </a:prstGeom>
+        </p:spPr>
+      </p:pic>
+      <p:sp>
+        <p:nvSpPr>
+          <p:cNvPr id="12" name="Text 8"/>
+          <p:cNvSpPr txBox="1"/>
+          <p:nvPr/>
+        </p:nvSpPr>
+        <p:spPr>
+          <a:xfrm>
+            <a:off x="5623560" y="1463040"/>
+            <a:ext cx="2926080" cy="365760"/>
+          </a:xfrm>
+          <a:prstGeom prst="rect">
+            <a:avLst/>
+          </a:prstGeom>
+          <a:noFill/>
+          <a:ln/>
+        </p:spPr>
+        <p:txBody>
+          <a:bodyPr wrap="square" lIns="0" tIns="0" rIns="0" bIns="0" rtlCol="0" anchor="ctr"/>
+          <a:lstStyle/>
+          <a:p>
+            <a:pPr indent="0" marL="0">
+              <a:buNone/>
+            </a:pPr>
+            <a:r>
+              <a:rPr lang="en-US" sz="1600" b="1" dirty="0">
+                <a:solidFill>
+                  <a:schemeClr val="tx2"/>
+                </a:solidFill>
+              </a:rPr>
+              <a:t>Credentials</a:t>
+            </a:r>
+            <a:endParaRPr lang="en-US" sz="1600" dirty="0"/>
+          </a:p>
+        </p:txBody>
+      </p:sp>
+      <p:sp>
+        <p:nvSpPr>
+          <p:cNvPr id="13" name="Text 9"/>
+          <p:cNvSpPr txBox="1"/>
+          <p:nvPr/>
+        </p:nvSpPr>
+        <p:spPr>
+          <a:xfrm>
+            <a:off x="5623560" y="1847088"/>
+            <a:ext cx="2926080" cy="777240"/>
+          </a:xfrm>
+          <a:prstGeom prst="rect">
+            <a:avLst/>
+          </a:prstGeom>
+          <a:noFill/>
+          <a:ln/>
+        </p:spPr>
+        <p:txBody>
+          <a:bodyPr wrap="square" lIns="0" tIns="0" rIns="0" bIns="0" rtlCol="0" anchor="t"/>
+          <a:lstStyle/>
+          <a:p>
+            <a:pPr indent="0" marL="0">
+              <a:buNone/>
+            </a:pPr>
+            <a:r>
+              <a:rPr lang="en-US" sz="1200" dirty="0">
+                <a:solidFill>
+                  <a:schemeClr val="tx1"/>
+                </a:solidFill>
+              </a:rPr>
+              <a:t>Secrets, certificates and federated credentials sit here, not on each agent. Rotate and watch expiry.</a:t>
+            </a:r>
+            <a:endParaRPr lang="en-US" sz="1200" dirty="0"/>
+          </a:p>
+        </p:txBody>
+      </p:sp>
+      <p:sp>
+        <p:nvSpPr>
+          <p:cNvPr id="14" name="Control card 3"/>
+          <p:cNvSpPr/>
+          <p:nvPr/>
+        </p:nvSpPr>
+        <p:spPr>
+          <a:xfrm>
+            <a:off x="457200" y="2926080"/>
+            <a:ext cx="4023360" cy="1463040"/>
+          </a:xfrm>
+          <a:prstGeom prst="roundRect">
+            <a:avLst>
+              <a:gd name="adj" fmla="val 7500"/>
+            </a:avLst>
+          </a:prstGeom>
+          <a:solidFill>
+            <a:schemeClr val="bg2"/>
+          </a:solidFill>
+          <a:ln/>
+        </p:spPr>
+      </p:sp>
+      <p:sp>
+        <p:nvSpPr>
+          <p:cNvPr id="15" name="Control icon bg 3"/>
+          <p:cNvSpPr/>
+          <p:nvPr/>
+        </p:nvSpPr>
+        <p:spPr>
+          <a:xfrm>
+            <a:off x="685800" y="3154680"/>
+            <a:ext cx="548640" cy="548640"/>
+          </a:xfrm>
+          <a:prstGeom prst="ellipse">
+            <a:avLst/>
+          </a:prstGeom>
+          <a:solidFill>
+            <a:schemeClr val="accent5"/>
+          </a:solidFill>
+          <a:ln/>
+        </p:spPr>
+      </p:sp>
+      <p:pic>
+        <p:nvPicPr>
+          <p:cNvPr id="16" name="Image 2" descr="Owners and sponsors">    </p:cNvPr>
+          <p:cNvPicPr>
+            <a:picLocks noChangeAspect="1"/>
+          </p:cNvPicPr>
+          <p:nvPr/>
+        </p:nvPicPr>
+        <p:blipFill>
+          <a:blip r:embed="rId3"/>
+          <a:stretch>
+            <a:fillRect/>
+          </a:stretch>
+        </p:blipFill>
+        <p:spPr>
+          <a:xfrm>
+            <a:off x="804672" y="3273552"/>
+            <a:ext cx="310896" cy="310896"/>
+          </a:xfrm>
+          <a:prstGeom prst="rect">
+            <a:avLst/>
+          </a:prstGeom>
+        </p:spPr>
+      </p:pic>
+      <p:sp>
+        <p:nvSpPr>
+          <p:cNvPr id="17" name="Text 12"/>
+          <p:cNvSpPr txBox="1"/>
+          <p:nvPr/>
+        </p:nvSpPr>
+        <p:spPr>
+          <a:xfrm>
+            <a:off x="1417320" y="3108960"/>
+            <a:ext cx="2926080" cy="365760"/>
+          </a:xfrm>
+          <a:prstGeom prst="rect">
+            <a:avLst/>
+          </a:prstGeom>
+          <a:noFill/>
+          <a:ln/>
+        </p:spPr>
+        <p:txBody>
+          <a:bodyPr wrap="square" lIns="0" tIns="0" rIns="0" bIns="0" rtlCol="0" anchor="ctr"/>
+          <a:lstStyle/>
+          <a:p>
+            <a:pPr indent="0" marL="0">
+              <a:buNone/>
+            </a:pPr>
+            <a:r>
+              <a:rPr lang="en-US" sz="1600" b="1" dirty="0">
+                <a:solidFill>
+                  <a:schemeClr val="tx2"/>
+                </a:solidFill>
+              </a:rPr>
+              <a:t>Owners and sponsors</a:t>
+            </a:r>
+            <a:endParaRPr lang="en-US" sz="1600" dirty="0"/>
+          </a:p>
+        </p:txBody>
+      </p:sp>
+      <p:sp>
+        <p:nvSpPr>
+          <p:cNvPr id="18" name="Text 13"/>
+          <p:cNvSpPr txBox="1"/>
+          <p:nvPr/>
+        </p:nvSpPr>
+        <p:spPr>
+          <a:xfrm>
+            <a:off x="1417320" y="3493008"/>
+            <a:ext cx="2926080" cy="777240"/>
+          </a:xfrm>
+          <a:prstGeom prst="rect">
+            <a:avLst/>
+          </a:prstGeom>
+          <a:noFill/>
+          <a:ln/>
+        </p:spPr>
+        <p:txBody>
+          <a:bodyPr wrap="square" lIns="0" tIns="0" rIns="0" bIns="0" rtlCol="0" anchor="t"/>
+          <a:lstStyle/>
+          <a:p>
+            <a:pPr indent="0" marL="0">
+              <a:buNone/>
+            </a:pPr>
+            <a:r>
+              <a:rPr lang="en-US" sz="1200" dirty="0">
+                <a:solidFill>
+                  <a:schemeClr val="tx1"/>
+                </a:solidFill>
+              </a:rPr>
+              <a:t>A sponsor is required at creation. Keep real people on it so agent families are never orphaned.</a:t>
+            </a:r>
+            <a:endParaRPr lang="en-US" sz="1200" dirty="0"/>
+          </a:p>
+        </p:txBody>
+      </p:sp>
+      <p:sp>
+        <p:nvSpPr>
+          <p:cNvPr id="19" name="Control card 4"/>
+          <p:cNvSpPr/>
+          <p:nvPr/>
+        </p:nvSpPr>
+        <p:spPr>
+          <a:xfrm>
+            <a:off x="4663440" y="2926080"/>
+            <a:ext cx="4023360" cy="1463040"/>
+          </a:xfrm>
+          <a:prstGeom prst="roundRect">
+            <a:avLst>
+              <a:gd name="adj" fmla="val 7500"/>
+            </a:avLst>
+          </a:prstGeom>
+          <a:solidFill>
+            <a:schemeClr val="bg2"/>
+          </a:solidFill>
+          <a:ln/>
+        </p:spPr>
+      </p:sp>
+      <p:sp>
+        <p:nvSpPr>
+          <p:cNvPr id="20" name="Control icon bg 4"/>
+          <p:cNvSpPr/>
+          <p:nvPr/>
+        </p:nvSpPr>
+        <p:spPr>
+          <a:xfrm>
+            <a:off x="4892040" y="3154680"/>
+            <a:ext cx="548640" cy="548640"/>
+          </a:xfrm>
+          <a:prstGeom prst="ellipse">
+            <a:avLst/>
+          </a:prstGeom>
+          <a:solidFill>
+            <a:schemeClr val="accent2"/>
+          </a:solidFill>
+          <a:ln/>
+        </p:spPr>
+      </p:sp>
+      <p:pic>
+        <p:nvPicPr>
+          <p:cNvPr id="21" name="Image 3" descr="Conditional Access target">    </p:cNvPr>
+          <p:cNvPicPr>
+            <a:picLocks noChangeAspect="1"/>
+          </p:cNvPicPr>
+          <p:nvPr/>
+        </p:nvPicPr>
+        <p:blipFill>
+          <a:blip r:embed="rId4"/>
+          <a:stretch>
+            <a:fillRect/>
+          </a:stretch>
+        </p:blipFill>
+        <p:spPr>
+          <a:xfrm>
+            <a:off x="5010912" y="3273552"/>
+            <a:ext cx="310896" cy="310896"/>
+          </a:xfrm>
+          <a:prstGeom prst="rect">
+            <a:avLst/>
+          </a:prstGeom>
+        </p:spPr>
+      </p:pic>
+      <p:sp>
+        <p:nvSpPr>
+          <p:cNvPr id="22" name="Text 16"/>
+          <p:cNvSpPr txBox="1"/>
+          <p:nvPr/>
+        </p:nvSpPr>
+        <p:spPr>
+          <a:xfrm>
+            <a:off x="5623560" y="3108960"/>
+            <a:ext cx="2926080" cy="365760"/>
+          </a:xfrm>
+          <a:prstGeom prst="rect">
+            <a:avLst/>
+          </a:prstGeom>
+          <a:noFill/>
+          <a:ln/>
+        </p:spPr>
+        <p:txBody>
+          <a:bodyPr wrap="square" lIns="0" tIns="0" rIns="0" bIns="0" rtlCol="0" anchor="ctr"/>
+          <a:lstStyle/>
+          <a:p>
+            <a:pPr indent="0" marL="0">
+              <a:buNone/>
+            </a:pPr>
+            <a:r>
+              <a:rPr lang="en-US" sz="1600" b="1" dirty="0">
+                <a:solidFill>
+                  <a:schemeClr val="tx2"/>
+                </a:solidFill>
+              </a:rPr>
+              <a:t>Conditional Access target</a:t>
+            </a:r>
+            <a:endParaRPr lang="en-US" sz="1600" dirty="0"/>
+          </a:p>
+        </p:txBody>
+      </p:sp>
+      <p:sp>
+        <p:nvSpPr>
+          <p:cNvPr id="23" name="Text 17"/>
+          <p:cNvSpPr txBox="1"/>
+          <p:nvPr/>
+        </p:nvSpPr>
+        <p:spPr>
+          <a:xfrm>
+            <a:off x="5623560" y="3493008"/>
+            <a:ext cx="2926080" cy="777240"/>
+          </a:xfrm>
+          <a:prstGeom prst="rect">
+            <a:avLst/>
+          </a:prstGeom>
+          <a:noFill/>
+          <a:ln/>
+        </p:spPr>
+        <p:txBody>
+          <a:bodyPr wrap="square" lIns="0" tIns="0" rIns="0" bIns="0" rtlCol="0" anchor="t"/>
+          <a:lstStyle/>
+          <a:p>
+            <a:pPr indent="0" marL="0">
+              <a:buNone/>
+            </a:pPr>
+            <a:r>
+              <a:rPr lang="en-US" sz="1200" dirty="0">
+                <a:solidFill>
+                  <a:schemeClr val="tx1"/>
+                </a:solidFill>
+              </a:rPr>
+              <a:t>A policy can target the blueprint and cover every current and future agent made from it.</a:t>
+            </a:r>
+            <a:endParaRPr lang="en-US" sz="1200" dirty="0"/>
+          </a:p>
+        </p:txBody>
+      </p:sp>
+      <p:sp>
+        <p:nvSpPr>
+          <p:cNvPr id="25" name="Slide Number Placeholder 0"/>
+          <p:cNvSpPr>
+            <a:spLocks noGrp="1"/>
+          </p:cNvSpPr>
+          <p:nvPr>
+            <p:ph type="sldNum" sz="quarter" idx="4294967295"/>
+          </p:nvPr>
+        </p:nvSpPr>
+        <p:spPr>
+          <a:xfrm>
+            <a:off x="8229600" y="4773168"/>
+            <a:ext cx="457200" cy="228600"/>
+          </a:xfrm>
+          <a:prstGeom prst="rect">
+            <a:avLst/>
+          </a:prstGeom>
+          <a:extLst>
+            <a:ext uri="{C572A759-6A51-4108-AA02-DFA0A04FC94B}">
+              <ma14:wrappingTextBoxFlag xmlns:ma14="http://schemas.microsoft.com/office/mac/drawingml/2011/main" val="0"/>
+            </a:ext>
+          </a:extLst>
+        </p:spPr>
+        <p:txBody>
+          <a:bodyPr/>
+          <a:lstStyle>
+            <a:lvl1pPr>
+              <a:defRPr sz="900">
+                <a:solidFill>
+                  <a:schemeClr val="accent6"/>
+                </a:solidFill>
+              </a:defRPr>
+            </a:lvl1pPr>
+          </a:lstStyle>
+          <a:p>
+            <a:pPr algn="r"/>
+            <a:fld id="{F7021451-1387-4CA6-816F-3879F97B5CBC}" type="slidenum">
+              <a:rPr b="0" lang="en-US"/>
+              <a:t>15</a:t>
+            </a:fld>
+            <a:endParaRPr lang="en-US"/>
+          </a:p>
+        </p:txBody>
+      </p:sp>
+    </p:spTree>
+  </p:cSld>
+  <p:clrMapOvr>
+    <a:masterClrMapping/>
+  </p:clrMapOvr>
+</p:sld>
+</file>
+
+<file path=ppt/slides/slide16.xml><?xml version="1.0" encoding="utf-8"?>
+<p:sld xmlns:a="http://schemas.openxmlformats.org/drawingml/2006/main" xmlns:r="http://schemas.openxmlformats.org/officeDocument/2006/relationships" xmlns:p="http://schemas.openxmlformats.org/presentationml/2006/main">
+  <p:cSld name="Slide 16">
+    <p:spTree>
+      <p:nvGrpSpPr>
+        <p:cNvPr id="1" name=""/>
+        <p:cNvGrpSpPr/>
+        <p:nvPr/>
+      </p:nvGrpSpPr>
+      <p:grpSpPr>
+        <a:xfrm>
+          <a:off x="0" y="0"/>
+          <a:ext cx="0" cy="0"/>
+          <a:chOff x="0" y="0"/>
+          <a:chExt cx="0" cy="0"/>
+        </a:xfrm>
+      </p:grpSpPr>
+      <p:sp>
+        <p:nvSpPr>
+          <p:cNvPr id="2" name="Text 0"/>
+          <p:cNvSpPr txBox="1"/>
+          <p:nvPr/>
+        </p:nvSpPr>
+        <p:spPr>
+          <a:xfrm>
+            <a:off x="457200" y="274320"/>
+            <a:ext cx="3657600" cy="201168"/>
+          </a:xfrm>
+          <a:prstGeom prst="rect">
+            <a:avLst/>
+          </a:prstGeom>
+          <a:noFill/>
+          <a:ln/>
+        </p:spPr>
+        <p:txBody>
+          <a:bodyPr wrap="square" lIns="0" tIns="0" rIns="0" bIns="0" rtlCol="0" anchor="ctr"/>
+          <a:lstStyle/>
+          <a:p>
+            <a:pPr indent="0" marL="0">
+              <a:buNone/>
+            </a:pPr>
+            <a:r>
+              <a:rPr lang="en-US" sz="1000" b="1" spc="200" kern="0" dirty="0">
+                <a:solidFill>
+                  <a:schemeClr val="accent1"/>
+                </a:solidFill>
+              </a:rPr>
+              <a:t>BLUEPRINTS  ·  ACTIONS</a:t>
+            </a:r>
+            <a:endParaRPr lang="en-US" sz="1000" dirty="0"/>
+          </a:p>
+        </p:txBody>
+      </p:sp>
+      <p:sp>
+        <p:nvSpPr>
+          <p:cNvPr id="3" name="Text 0"/>
+          <p:cNvSpPr/>
+          <p:nvPr>
+            <p:ph idx="100" type="title" hasCustomPrompt="1"/>
+          </p:nvPr>
+        </p:nvSpPr>
+        <p:spPr>
+          <a:xfrm>
+            <a:off x="457200" y="502920"/>
+            <a:ext cx="8229600" cy="594360"/>
+          </a:xfrm>
+          <a:prstGeom prst="rect">
+            <a:avLst/>
+          </a:prstGeom>
+          <a:noFill/>
+          <a:ln/>
+        </p:spPr>
+        <p:txBody>
+          <a:bodyPr wrap="square" lIns="0" tIns="0" rIns="0" bIns="0" rtlCol="0" anchor="ctr"/>
+          <a:lstStyle/>
+          <a:p>
+            <a:pPr algn="l" indent="0" marL="0">
+              <a:buNone/>
+            </a:pPr>
+            <a:r>
+              <a:rPr lang="en-US" sz="2800" b="1" dirty="0">
+                <a:solidFill>
+                  <a:schemeClr val="tx2"/>
+                </a:solidFill>
+              </a:rPr>
+              <a:t>Blueprint checklist for our Agent 365 rollout</a:t>
+            </a:r>
+            <a:endParaRPr lang="en-US" sz="2800" dirty="0"/>
+          </a:p>
+        </p:txBody>
+      </p:sp>
+      <p:sp>
+        <p:nvSpPr>
+          <p:cNvPr id="4" name="Step 1"/>
+          <p:cNvSpPr/>
+          <p:nvPr/>
+        </p:nvSpPr>
+        <p:spPr>
+          <a:xfrm>
+            <a:off x="457200" y="1280160"/>
+            <a:ext cx="4023360" cy="914400"/>
+          </a:xfrm>
+          <a:prstGeom prst="roundRect">
+            <a:avLst>
+              <a:gd name="adj" fmla="val 10000"/>
+            </a:avLst>
+          </a:prstGeom>
+          <a:solidFill>
+            <a:schemeClr val="bg2"/>
+          </a:solidFill>
+          <a:ln/>
+        </p:spPr>
+      </p:sp>
+      <p:sp>
+        <p:nvSpPr>
+          <p:cNvPr id="5" name="Step 1 badge"/>
+          <p:cNvSpPr/>
+          <p:nvPr/>
+        </p:nvSpPr>
+        <p:spPr>
+          <a:xfrm>
+            <a:off x="640080" y="1481328"/>
+            <a:ext cx="512064" cy="512064"/>
+          </a:xfrm>
+          <a:prstGeom prst="ellipse">
+            <a:avLst/>
+          </a:prstGeom>
+          <a:solidFill>
+            <a:schemeClr val="accent1"/>
+          </a:solidFill>
+          <a:ln/>
+        </p:spPr>
+      </p:sp>
+      <p:sp>
+        <p:nvSpPr>
+          <p:cNvPr id="6" name="Text 4"/>
+          <p:cNvSpPr txBox="1"/>
+          <p:nvPr/>
+        </p:nvSpPr>
+        <p:spPr>
+          <a:xfrm>
+            <a:off x="640080" y="1481328"/>
+            <a:ext cx="512064" cy="512064"/>
+          </a:xfrm>
+          <a:prstGeom prst="rect">
+            <a:avLst/>
+          </a:prstGeom>
+          <a:noFill/>
+          <a:ln/>
+        </p:spPr>
+        <p:txBody>
+          <a:bodyPr wrap="square" lIns="0" tIns="0" rIns="0" bIns="0" rtlCol="0" anchor="ctr"/>
+          <a:lstStyle/>
+          <a:p>
+            <a:pPr algn="ctr" indent="0" marL="0">
+              <a:buNone/>
+            </a:pPr>
+            <a:r>
+              <a:rPr lang="en-US" sz="1800" b="1" dirty="0">
+                <a:solidFill>
+                  <a:schemeClr val="bg1"/>
+                </a:solidFill>
+              </a:rPr>
+              <a:t>1</a:t>
+            </a:r>
+            <a:endParaRPr lang="en-US" sz="1800" dirty="0"/>
+          </a:p>
+        </p:txBody>
+      </p:sp>
+      <p:sp>
+        <p:nvSpPr>
+          <p:cNvPr id="7" name="Text 5"/>
+          <p:cNvSpPr txBox="1"/>
+          <p:nvPr/>
+        </p:nvSpPr>
+        <p:spPr>
+          <a:xfrm>
+            <a:off x="1325880" y="1280160"/>
+            <a:ext cx="3063240" cy="914400"/>
+          </a:xfrm>
+          <a:prstGeom prst="rect">
+            <a:avLst/>
+          </a:prstGeom>
+          <a:noFill/>
+          <a:ln/>
+        </p:spPr>
+        <p:txBody>
+          <a:bodyPr wrap="square" lIns="0" tIns="0" rIns="0" bIns="0" rtlCol="0" anchor="ctr"/>
+          <a:lstStyle/>
+          <a:p>
+            <a:pPr indent="0" marL="0">
+              <a:buNone/>
+            </a:pPr>
+            <a:r>
+              <a:rPr lang="en-US" sz="1400" b="1" dirty="0">
+                <a:solidFill>
+                  <a:schemeClr val="tx2"/>
+                </a:solidFill>
+              </a:rPr>
+              <a:t>Inventory</a:t>
+            </a:r>
+            <a:endParaRPr lang="en-US" sz="1400" dirty="0"/>
+          </a:p>
+          <a:p>
+            <a:pPr indent="0" marL="0">
+              <a:buNone/>
+            </a:pPr>
+            <a:r>
+              <a:rPr lang="en-US" sz="1200" dirty="0">
+                <a:solidFill>
+                  <a:schemeClr val="tx1"/>
+                </a:solidFill>
+              </a:rPr>
+              <a:t>List blueprints in Entra › Agent ID; group registry agents by blueprint.</a:t>
+            </a:r>
+            <a:endParaRPr lang="en-US" sz="1400" dirty="0"/>
+          </a:p>
+        </p:txBody>
+      </p:sp>
+      <p:sp>
+        <p:nvSpPr>
+          <p:cNvPr id="8" name="Step 2"/>
+          <p:cNvSpPr/>
+          <p:nvPr/>
+        </p:nvSpPr>
+        <p:spPr>
+          <a:xfrm>
+            <a:off x="457200" y="2331720"/>
+            <a:ext cx="4023360" cy="914400"/>
+          </a:xfrm>
+          <a:prstGeom prst="roundRect">
+            <a:avLst>
+              <a:gd name="adj" fmla="val 10000"/>
+            </a:avLst>
+          </a:prstGeom>
+          <a:solidFill>
+            <a:schemeClr val="bg2"/>
+          </a:solidFill>
+          <a:ln/>
+        </p:spPr>
+      </p:sp>
+      <p:sp>
+        <p:nvSpPr>
+          <p:cNvPr id="9" name="Step 2 badge"/>
+          <p:cNvSpPr/>
+          <p:nvPr/>
+        </p:nvSpPr>
+        <p:spPr>
+          <a:xfrm>
+            <a:off x="640080" y="2532888"/>
+            <a:ext cx="512064" cy="512064"/>
+          </a:xfrm>
+          <a:prstGeom prst="ellipse">
+            <a:avLst/>
+          </a:prstGeom>
+          <a:solidFill>
+            <a:schemeClr val="accent1"/>
+          </a:solidFill>
+          <a:ln/>
+        </p:spPr>
+      </p:sp>
+      <p:sp>
+        <p:nvSpPr>
+          <p:cNvPr id="10" name="Text 8"/>
+          <p:cNvSpPr txBox="1"/>
+          <p:nvPr/>
+        </p:nvSpPr>
+        <p:spPr>
+          <a:xfrm>
+            <a:off x="640080" y="2532888"/>
+            <a:ext cx="512064" cy="512064"/>
+          </a:xfrm>
+          <a:prstGeom prst="rect">
+            <a:avLst/>
+          </a:prstGeom>
+          <a:noFill/>
+          <a:ln/>
+        </p:spPr>
+        <p:txBody>
+          <a:bodyPr wrap="square" lIns="0" tIns="0" rIns="0" bIns="0" rtlCol="0" anchor="ctr"/>
+          <a:lstStyle/>
+          <a:p>
+            <a:pPr algn="ctr" indent="0" marL="0">
+              <a:buNone/>
+            </a:pPr>
+            <a:r>
+              <a:rPr lang="en-US" sz="1800" b="1" dirty="0">
+                <a:solidFill>
+                  <a:schemeClr val="bg1"/>
+                </a:solidFill>
+              </a:rPr>
+              <a:t>2</a:t>
+            </a:r>
+            <a:endParaRPr lang="en-US" sz="1800" dirty="0"/>
+          </a:p>
+        </p:txBody>
+      </p:sp>
+      <p:sp>
+        <p:nvSpPr>
+          <p:cNvPr id="11" name="Text 9"/>
+          <p:cNvSpPr txBox="1"/>
+          <p:nvPr/>
+        </p:nvSpPr>
+        <p:spPr>
+          <a:xfrm>
+            <a:off x="1325880" y="2331720"/>
+            <a:ext cx="3063240" cy="914400"/>
+          </a:xfrm>
+          <a:prstGeom prst="rect">
+            <a:avLst/>
+          </a:prstGeom>
+          <a:noFill/>
+          <a:ln/>
+        </p:spPr>
+        <p:txBody>
+          <a:bodyPr wrap="square" lIns="0" tIns="0" rIns="0" bIns="0" rtlCol="0" anchor="ctr"/>
+          <a:lstStyle/>
+          <a:p>
+            <a:pPr indent="0" marL="0">
+              <a:buNone/>
+            </a:pPr>
+            <a:r>
+              <a:rPr lang="en-US" sz="1400" b="1" dirty="0">
+                <a:solidFill>
+                  <a:schemeClr val="tx2"/>
+                </a:solidFill>
+              </a:rPr>
+              <a:t>Review inheritable permissions</a:t>
+            </a:r>
+            <a:endParaRPr lang="en-US" sz="1400" dirty="0"/>
+          </a:p>
+          <a:p>
+            <a:pPr indent="0" marL="0">
+              <a:buNone/>
+            </a:pPr>
+            <a:r>
+              <a:rPr lang="en-US" sz="1200" dirty="0">
+                <a:solidFill>
+                  <a:schemeClr val="tx1"/>
+                </a:solidFill>
+              </a:rPr>
+              <a:t>Least privilege – approve once per blueprint, not per agent.</a:t>
+            </a:r>
+            <a:endParaRPr lang="en-US" sz="1400" dirty="0"/>
+          </a:p>
+        </p:txBody>
+      </p:sp>
+      <p:sp>
+        <p:nvSpPr>
+          <p:cNvPr id="12" name="Step 3"/>
+          <p:cNvSpPr/>
+          <p:nvPr/>
+        </p:nvSpPr>
+        <p:spPr>
+          <a:xfrm>
+            <a:off x="457200" y="3383280"/>
+            <a:ext cx="4023360" cy="914400"/>
+          </a:xfrm>
+          <a:prstGeom prst="roundRect">
+            <a:avLst>
+              <a:gd name="adj" fmla="val 10000"/>
+            </a:avLst>
+          </a:prstGeom>
+          <a:solidFill>
+            <a:schemeClr val="bg2"/>
+          </a:solidFill>
+          <a:ln/>
+        </p:spPr>
+      </p:sp>
+      <p:sp>
+        <p:nvSpPr>
+          <p:cNvPr id="13" name="Step 3 badge"/>
+          <p:cNvSpPr/>
+          <p:nvPr/>
+        </p:nvSpPr>
+        <p:spPr>
+          <a:xfrm>
+            <a:off x="640080" y="3584448"/>
+            <a:ext cx="512064" cy="512064"/>
+          </a:xfrm>
+          <a:prstGeom prst="ellipse">
+            <a:avLst/>
+          </a:prstGeom>
+          <a:solidFill>
+            <a:schemeClr val="accent1"/>
+          </a:solidFill>
+          <a:ln/>
+        </p:spPr>
+      </p:sp>
+      <p:sp>
+        <p:nvSpPr>
+          <p:cNvPr id="14" name="Text 12"/>
+          <p:cNvSpPr txBox="1"/>
+          <p:nvPr/>
+        </p:nvSpPr>
+        <p:spPr>
+          <a:xfrm>
+            <a:off x="640080" y="3584448"/>
+            <a:ext cx="512064" cy="512064"/>
+          </a:xfrm>
+          <a:prstGeom prst="rect">
+            <a:avLst/>
+          </a:prstGeom>
+          <a:noFill/>
+          <a:ln/>
+        </p:spPr>
+        <p:txBody>
+          <a:bodyPr wrap="square" lIns="0" tIns="0" rIns="0" bIns="0" rtlCol="0" anchor="ctr"/>
+          <a:lstStyle/>
+          <a:p>
+            <a:pPr algn="ctr" indent="0" marL="0">
+              <a:buNone/>
+            </a:pPr>
+            <a:r>
+              <a:rPr lang="en-US" sz="1800" b="1" dirty="0">
+                <a:solidFill>
+                  <a:schemeClr val="bg1"/>
+                </a:solidFill>
+              </a:rPr>
+              <a:t>3</a:t>
+            </a:r>
+            <a:endParaRPr lang="en-US" sz="1800" dirty="0"/>
+          </a:p>
+        </p:txBody>
+      </p:sp>
+      <p:sp>
+        <p:nvSpPr>
+          <p:cNvPr id="15" name="Text 13"/>
+          <p:cNvSpPr txBox="1"/>
+          <p:nvPr/>
+        </p:nvSpPr>
+        <p:spPr>
+          <a:xfrm>
+            <a:off x="1325880" y="3383280"/>
+            <a:ext cx="3063240" cy="914400"/>
+          </a:xfrm>
+          <a:prstGeom prst="rect">
+            <a:avLst/>
+          </a:prstGeom>
+          <a:noFill/>
+          <a:ln/>
+        </p:spPr>
+        <p:txBody>
+          <a:bodyPr wrap="square" lIns="0" tIns="0" rIns="0" bIns="0" rtlCol="0" anchor="ctr"/>
+          <a:lstStyle/>
+          <a:p>
+            <a:pPr indent="0" marL="0">
+              <a:buNone/>
+            </a:pPr>
+            <a:r>
+              <a:rPr lang="en-US" sz="1400" b="1" dirty="0">
+                <a:solidFill>
+                  <a:schemeClr val="tx2"/>
+                </a:solidFill>
+              </a:rPr>
+              <a:t>Govern credentials</a:t>
+            </a:r>
+            <a:endParaRPr lang="en-US" sz="1400" dirty="0"/>
+          </a:p>
+          <a:p>
+            <a:pPr indent="0" marL="0">
+              <a:buNone/>
+            </a:pPr>
+            <a:r>
+              <a:rPr lang="en-US" sz="1200" dirty="0">
+                <a:solidFill>
+                  <a:schemeClr val="tx1"/>
+                </a:solidFill>
+              </a:rPr>
+              <a:t>Prefer certificates or federated credentials; track expiry.</a:t>
+            </a:r>
+            <a:endParaRPr lang="en-US" sz="1400" dirty="0"/>
+          </a:p>
+        </p:txBody>
+      </p:sp>
+      <p:sp>
+        <p:nvSpPr>
+          <p:cNvPr id="16" name="Step 4"/>
+          <p:cNvSpPr/>
+          <p:nvPr/>
+        </p:nvSpPr>
+        <p:spPr>
+          <a:xfrm>
+            <a:off x="4663440" y="1280160"/>
+            <a:ext cx="4023360" cy="914400"/>
+          </a:xfrm>
+          <a:prstGeom prst="roundRect">
+            <a:avLst>
+              <a:gd name="adj" fmla="val 10000"/>
+            </a:avLst>
+          </a:prstGeom>
+          <a:solidFill>
+            <a:schemeClr val="bg2"/>
+          </a:solidFill>
+          <a:ln/>
+        </p:spPr>
+      </p:sp>
+      <p:sp>
+        <p:nvSpPr>
+          <p:cNvPr id="17" name="Step 4 badge"/>
+          <p:cNvSpPr/>
+          <p:nvPr/>
+        </p:nvSpPr>
+        <p:spPr>
+          <a:xfrm>
+            <a:off x="4846320" y="1481328"/>
+            <a:ext cx="512064" cy="512064"/>
+          </a:xfrm>
+          <a:prstGeom prst="ellipse">
+            <a:avLst/>
+          </a:prstGeom>
+          <a:solidFill>
+            <a:schemeClr val="accent1"/>
+          </a:solidFill>
+          <a:ln/>
+        </p:spPr>
+      </p:sp>
+      <p:sp>
+        <p:nvSpPr>
+          <p:cNvPr id="18" name="Text 16"/>
+          <p:cNvSpPr txBox="1"/>
+          <p:nvPr/>
+        </p:nvSpPr>
+        <p:spPr>
+          <a:xfrm>
+            <a:off x="4846320" y="1481328"/>
+            <a:ext cx="512064" cy="512064"/>
+          </a:xfrm>
+          <a:prstGeom prst="rect">
+            <a:avLst/>
+          </a:prstGeom>
+          <a:noFill/>
+          <a:ln/>
+        </p:spPr>
+        <p:txBody>
+          <a:bodyPr wrap="square" lIns="0" tIns="0" rIns="0" bIns="0" rtlCol="0" anchor="ctr"/>
+          <a:lstStyle/>
+          <a:p>
+            <a:pPr algn="ctr" indent="0" marL="0">
+              <a:buNone/>
+            </a:pPr>
+            <a:r>
+              <a:rPr lang="en-US" sz="1800" b="1" dirty="0">
+                <a:solidFill>
+                  <a:schemeClr val="bg1"/>
+                </a:solidFill>
+              </a:rPr>
+              <a:t>4</a:t>
+            </a:r>
+            <a:endParaRPr lang="en-US" sz="1800" dirty="0"/>
+          </a:p>
+        </p:txBody>
+      </p:sp>
+      <p:sp>
+        <p:nvSpPr>
+          <p:cNvPr id="19" name="Text 17"/>
+          <p:cNvSpPr txBox="1"/>
+          <p:nvPr/>
+        </p:nvSpPr>
+        <p:spPr>
+          <a:xfrm>
+            <a:off x="5532120" y="1280160"/>
+            <a:ext cx="3063240" cy="914400"/>
+          </a:xfrm>
+          <a:prstGeom prst="rect">
+            <a:avLst/>
+          </a:prstGeom>
+          <a:noFill/>
+          <a:ln/>
+        </p:spPr>
+        <p:txBody>
+          <a:bodyPr wrap="square" lIns="0" tIns="0" rIns="0" bIns="0" rtlCol="0" anchor="ctr"/>
+          <a:lstStyle/>
+          <a:p>
+            <a:pPr indent="0" marL="0">
+              <a:buNone/>
+            </a:pPr>
+            <a:r>
+              <a:rPr lang="en-US" sz="1400" b="1" dirty="0">
+                <a:solidFill>
+                  <a:schemeClr val="tx2"/>
+                </a:solidFill>
+              </a:rPr>
+              <a:t>Assign owners and sponsors</a:t>
+            </a:r>
+            <a:endParaRPr lang="en-US" sz="1400" dirty="0"/>
+          </a:p>
+          <a:p>
+            <a:pPr indent="0" marL="0">
+              <a:buNone/>
+            </a:pPr>
+            <a:r>
+              <a:rPr lang="en-US" sz="1200" dirty="0">
+                <a:solidFill>
+                  <a:schemeClr val="tx1"/>
+                </a:solidFill>
+              </a:rPr>
+              <a:t>Named people on every blueprint, reviewed when roles change.</a:t>
+            </a:r>
+            <a:endParaRPr lang="en-US" sz="1400" dirty="0"/>
+          </a:p>
+        </p:txBody>
+      </p:sp>
+      <p:sp>
+        <p:nvSpPr>
+          <p:cNvPr id="20" name="Step 5"/>
+          <p:cNvSpPr/>
+          <p:nvPr/>
+        </p:nvSpPr>
+        <p:spPr>
+          <a:xfrm>
+            <a:off x="4663440" y="2331720"/>
+            <a:ext cx="4023360" cy="914400"/>
+          </a:xfrm>
+          <a:prstGeom prst="roundRect">
+            <a:avLst>
+              <a:gd name="adj" fmla="val 10000"/>
+            </a:avLst>
+          </a:prstGeom>
+          <a:solidFill>
+            <a:schemeClr val="bg2"/>
+          </a:solidFill>
+          <a:ln/>
+        </p:spPr>
+      </p:sp>
+      <p:sp>
+        <p:nvSpPr>
+          <p:cNvPr id="21" name="Step 5 badge"/>
+          <p:cNvSpPr/>
+          <p:nvPr/>
+        </p:nvSpPr>
+        <p:spPr>
+          <a:xfrm>
+            <a:off x="4846320" y="2532888"/>
+            <a:ext cx="512064" cy="512064"/>
+          </a:xfrm>
+          <a:prstGeom prst="ellipse">
+            <a:avLst/>
+          </a:prstGeom>
+          <a:solidFill>
+            <a:schemeClr val="accent1"/>
+          </a:solidFill>
+          <a:ln/>
+        </p:spPr>
+      </p:sp>
+      <p:sp>
+        <p:nvSpPr>
+          <p:cNvPr id="22" name="Text 20"/>
+          <p:cNvSpPr txBox="1"/>
+          <p:nvPr/>
+        </p:nvSpPr>
+        <p:spPr>
+          <a:xfrm>
+            <a:off x="4846320" y="2532888"/>
+            <a:ext cx="512064" cy="512064"/>
+          </a:xfrm>
+          <a:prstGeom prst="rect">
+            <a:avLst/>
+          </a:prstGeom>
+          <a:noFill/>
+          <a:ln/>
+        </p:spPr>
+        <p:txBody>
+          <a:bodyPr wrap="square" lIns="0" tIns="0" rIns="0" bIns="0" rtlCol="0" anchor="ctr"/>
+          <a:lstStyle/>
+          <a:p>
+            <a:pPr algn="ctr" indent="0" marL="0">
+              <a:buNone/>
+            </a:pPr>
+            <a:r>
+              <a:rPr lang="en-US" sz="1800" b="1" dirty="0">
+                <a:solidFill>
+                  <a:schemeClr val="bg1"/>
+                </a:solidFill>
+              </a:rPr>
+              <a:t>5</a:t>
+            </a:r>
+            <a:endParaRPr lang="en-US" sz="1800" dirty="0"/>
+          </a:p>
+        </p:txBody>
+      </p:sp>
+      <p:sp>
+        <p:nvSpPr>
+          <p:cNvPr id="23" name="Text 21"/>
+          <p:cNvSpPr txBox="1"/>
+          <p:nvPr/>
+        </p:nvSpPr>
+        <p:spPr>
+          <a:xfrm>
+            <a:off x="5532120" y="2331720"/>
+            <a:ext cx="3063240" cy="914400"/>
+          </a:xfrm>
+          <a:prstGeom prst="rect">
+            <a:avLst/>
+          </a:prstGeom>
+          <a:noFill/>
+          <a:ln/>
+        </p:spPr>
+        <p:txBody>
+          <a:bodyPr wrap="square" lIns="0" tIns="0" rIns="0" bIns="0" rtlCol="0" anchor="ctr"/>
+          <a:lstStyle/>
+          <a:p>
+            <a:pPr indent="0" marL="0">
+              <a:buNone/>
+            </a:pPr>
+            <a:r>
+              <a:rPr lang="en-US" sz="1400" b="1" dirty="0">
+                <a:solidFill>
+                  <a:schemeClr val="tx2"/>
+                </a:solidFill>
+              </a:rPr>
+              <a:t>Scope Conditional Access</a:t>
+            </a:r>
+            <a:endParaRPr lang="en-US" sz="1400" dirty="0"/>
+          </a:p>
+          <a:p>
+            <a:pPr indent="0" marL="0">
+              <a:buNone/>
+            </a:pPr>
+            <a:r>
+              <a:rPr lang="en-US" sz="1200" dirty="0">
+                <a:solidFill>
+                  <a:schemeClr val="tx1"/>
+                </a:solidFill>
+              </a:rPr>
+              <a:t>Target by blueprint for whole families; exclude explicitly.</a:t>
+            </a:r>
+            <a:endParaRPr lang="en-US" sz="1400" dirty="0"/>
+          </a:p>
+        </p:txBody>
+      </p:sp>
+      <p:sp>
+        <p:nvSpPr>
+          <p:cNvPr id="24" name="Step 6"/>
+          <p:cNvSpPr/>
+          <p:nvPr/>
+        </p:nvSpPr>
+        <p:spPr>
+          <a:xfrm>
+            <a:off x="4663440" y="3383280"/>
+            <a:ext cx="4023360" cy="914400"/>
+          </a:xfrm>
+          <a:prstGeom prst="roundRect">
+            <a:avLst>
+              <a:gd name="adj" fmla="val 10000"/>
+            </a:avLst>
+          </a:prstGeom>
+          <a:solidFill>
+            <a:schemeClr val="bg2"/>
+          </a:solidFill>
+          <a:ln/>
+        </p:spPr>
+      </p:sp>
+      <p:sp>
+        <p:nvSpPr>
+          <p:cNvPr id="25" name="Step 6 badge"/>
+          <p:cNvSpPr/>
+          <p:nvPr/>
+        </p:nvSpPr>
+        <p:spPr>
+          <a:xfrm>
+            <a:off x="4846320" y="3584448"/>
+            <a:ext cx="512064" cy="512064"/>
+          </a:xfrm>
+          <a:prstGeom prst="ellipse">
+            <a:avLst/>
+          </a:prstGeom>
+          <a:solidFill>
+            <a:schemeClr val="accent1"/>
+          </a:solidFill>
+          <a:ln/>
+        </p:spPr>
+      </p:sp>
+      <p:sp>
+        <p:nvSpPr>
+          <p:cNvPr id="26" name="Text 24"/>
+          <p:cNvSpPr txBox="1"/>
+          <p:nvPr/>
+        </p:nvSpPr>
+        <p:spPr>
+          <a:xfrm>
+            <a:off x="4846320" y="3584448"/>
+            <a:ext cx="512064" cy="512064"/>
+          </a:xfrm>
+          <a:prstGeom prst="rect">
+            <a:avLst/>
+          </a:prstGeom>
+          <a:noFill/>
+          <a:ln/>
+        </p:spPr>
+        <p:txBody>
+          <a:bodyPr wrap="square" lIns="0" tIns="0" rIns="0" bIns="0" rtlCol="0" anchor="ctr"/>
+          <a:lstStyle/>
+          <a:p>
+            <a:pPr algn="ctr" indent="0" marL="0">
+              <a:buNone/>
+            </a:pPr>
+            <a:r>
+              <a:rPr lang="en-US" sz="1800" b="1" dirty="0">
+                <a:solidFill>
+                  <a:schemeClr val="bg1"/>
+                </a:solidFill>
+              </a:rPr>
+              <a:t>6</a:t>
+            </a:r>
+            <a:endParaRPr lang="en-US" sz="1800" dirty="0"/>
+          </a:p>
+        </p:txBody>
+      </p:sp>
+      <p:sp>
+        <p:nvSpPr>
+          <p:cNvPr id="27" name="Text 25"/>
+          <p:cNvSpPr txBox="1"/>
+          <p:nvPr/>
+        </p:nvSpPr>
+        <p:spPr>
+          <a:xfrm>
+            <a:off x="5532120" y="3383280"/>
+            <a:ext cx="3063240" cy="914400"/>
+          </a:xfrm>
+          <a:prstGeom prst="rect">
+            <a:avLst/>
+          </a:prstGeom>
+          <a:noFill/>
+          <a:ln/>
+        </p:spPr>
+        <p:txBody>
+          <a:bodyPr wrap="square" lIns="0" tIns="0" rIns="0" bIns="0" rtlCol="0" anchor="ctr"/>
+          <a:lstStyle/>
+          <a:p>
+            <a:pPr indent="0" marL="0">
+              <a:buNone/>
+            </a:pPr>
+            <a:r>
+              <a:rPr lang="en-US" sz="1400" b="1" dirty="0">
+                <a:solidFill>
+                  <a:schemeClr val="tx2"/>
+                </a:solidFill>
+              </a:rPr>
+              <a:t>Control creation</a:t>
+            </a:r>
+            <a:endParaRPr lang="en-US" sz="1400" dirty="0"/>
+          </a:p>
+          <a:p>
+            <a:pPr indent="0" marL="0">
+              <a:buNone/>
+            </a:pPr>
+            <a:r>
+              <a:rPr lang="en-US" sz="1200" dirty="0">
+                <a:solidFill>
+                  <a:schemeClr val="tx1"/>
+                </a:solidFill>
+              </a:rPr>
+              <a:t>Platforms create their own; custom agents need one blueprint per product plus approval.</a:t>
+            </a:r>
+            <a:endParaRPr lang="en-US" sz="1400" dirty="0"/>
+          </a:p>
+        </p:txBody>
+      </p:sp>
+      <p:sp>
+        <p:nvSpPr>
+          <p:cNvPr id="25" name="Slide Number Placeholder 0"/>
+          <p:cNvSpPr>
+            <a:spLocks noGrp="1"/>
+          </p:cNvSpPr>
+          <p:nvPr>
+            <p:ph type="sldNum" sz="quarter" idx="4294967295"/>
+          </p:nvPr>
+        </p:nvSpPr>
+        <p:spPr>
+          <a:xfrm>
+            <a:off x="8229600" y="4773168"/>
+            <a:ext cx="457200" cy="228600"/>
+          </a:xfrm>
+          <a:prstGeom prst="rect">
+            <a:avLst/>
+          </a:prstGeom>
+          <a:extLst>
+            <a:ext uri="{C572A759-6A51-4108-AA02-DFA0A04FC94B}">
+              <ma14:wrappingTextBoxFlag xmlns:ma14="http://schemas.microsoft.com/office/mac/drawingml/2011/main" val="0"/>
+            </a:ext>
+          </a:extLst>
+        </p:spPr>
+        <p:txBody>
+          <a:bodyPr/>
+          <a:lstStyle>
+            <a:lvl1pPr>
+              <a:defRPr sz="900">
+                <a:solidFill>
+                  <a:schemeClr val="accent6"/>
+                </a:solidFill>
+              </a:defRPr>
+            </a:lvl1pPr>
+          </a:lstStyle>
+          <a:p>
+            <a:pPr algn="r"/>
+            <a:fld id="{F7021451-1387-4CA6-816F-3879F97B5CBC}" type="slidenum">
+              <a:rPr b="0" lang="en-US"/>
+              <a:t>16</a:t>
+            </a:fld>
+            <a:endParaRPr lang="en-US"/>
+          </a:p>
+        </p:txBody>
+      </p:sp>
+    </p:spTree>
+  </p:cSld>
+  <p:clrMapOvr>
+    <a:masterClrMapping/>
+  </p:clrMapOvr>
+</p:sld>
+</file>
+
+<file path=ppt/slides/slide17.xml><?xml version="1.0" encoding="utf-8"?>
+<p:sld xmlns:a="http://schemas.openxmlformats.org/drawingml/2006/main" xmlns:r="http://schemas.openxmlformats.org/officeDocument/2006/relationships" xmlns:p="http://schemas.openxmlformats.org/presentationml/2006/main">
+  <p:cSld name="Slide 17">
+    <p:spTree>
+      <p:nvGrpSpPr>
+        <p:cNvPr id="1" name=""/>
+        <p:cNvGrpSpPr/>
+        <p:nvPr/>
+      </p:nvGrpSpPr>
+      <p:grpSpPr>
+        <a:xfrm>
+          <a:off x="0" y="0"/>
+          <a:ext cx="0" cy="0"/>
+          <a:chOff x="0" y="0"/>
+          <a:chExt cx="0" cy="0"/>
+        </a:xfrm>
+      </p:grpSpPr>
+      <p:sp>
+        <p:nvSpPr>
+          <p:cNvPr id="2" name="Text 0"/>
+          <p:cNvSpPr/>
+          <p:nvPr>
+            <p:ph idx="100" type="title" hasCustomPrompt="1"/>
+          </p:nvPr>
+        </p:nvSpPr>
+        <p:spPr>
+          <a:xfrm>
+            <a:off x="457200" y="502920"/>
+            <a:ext cx="8229600" cy="594360"/>
+          </a:xfrm>
+          <a:prstGeom prst="rect">
+            <a:avLst/>
+          </a:prstGeom>
+          <a:noFill/>
+          <a:ln/>
+        </p:spPr>
+        <p:txBody>
+          <a:bodyPr wrap="square" lIns="0" tIns="0" rIns="0" bIns="0" rtlCol="0" anchor="ctr"/>
+          <a:lstStyle/>
+          <a:p>
+            <a:pPr algn="l" indent="0" marL="0">
+              <a:buNone/>
+            </a:pPr>
+            <a:r>
+              <a:rPr lang="en-US" sz="2800" b="1" dirty="0">
+                <a:solidFill>
+                  <a:schemeClr val="tx2"/>
+                </a:solidFill>
+              </a:rPr>
+              <a:t>Before we start: licensing and prerequisites</a:t>
+            </a:r>
+            <a:endParaRPr lang="en-US" sz="2800" dirty="0"/>
+          </a:p>
+        </p:txBody>
+      </p:sp>
+      <p:sp>
+        <p:nvSpPr>
+          <p:cNvPr id="3" name="Prereq row 1"/>
+          <p:cNvSpPr/>
+          <p:nvPr/>
+        </p:nvSpPr>
+        <p:spPr>
+          <a:xfrm>
+            <a:off x="457200" y="1280160"/>
+            <a:ext cx="8229600" cy="960120"/>
+          </a:xfrm>
+          <a:prstGeom prst="roundRect">
+            <a:avLst>
+              <a:gd name="adj" fmla="val 9524"/>
+            </a:avLst>
+          </a:prstGeom>
+          <a:solidFill>
+            <a:schemeClr val="bg2"/>
+          </a:solidFill>
+          <a:ln/>
+        </p:spPr>
+      </p:sp>
+      <p:sp>
+        <p:nvSpPr>
+          <p:cNvPr id="4" name="Prereq icon bg 1"/>
+          <p:cNvSpPr/>
+          <p:nvPr/>
+        </p:nvSpPr>
+        <p:spPr>
+          <a:xfrm>
+            <a:off x="658368" y="1508760"/>
+            <a:ext cx="502920" cy="502920"/>
+          </a:xfrm>
+          <a:prstGeom prst="ellipse">
+            <a:avLst/>
+          </a:prstGeom>
+          <a:solidFill>
+            <a:schemeClr val="accent3"/>
+          </a:solidFill>
+          <a:ln/>
+        </p:spPr>
+      </p:sp>
+      <p:pic>
+        <p:nvPicPr>
+          <p:cNvPr id="5" name="Image 0" descr="Licensing">    </p:cNvPr>
+          <p:cNvPicPr>
+            <a:picLocks noChangeAspect="1"/>
+          </p:cNvPicPr>
+          <p:nvPr/>
+        </p:nvPicPr>
+        <p:blipFill>
+          <a:blip r:embed="rId1"/>
+          <a:stretch>
+            <a:fillRect/>
+          </a:stretch>
+        </p:blipFill>
+        <p:spPr>
+          <a:xfrm>
+            <a:off x="768096" y="1618488"/>
+            <a:ext cx="283464" cy="283464"/>
+          </a:xfrm>
+          <a:prstGeom prst="rect">
+            <a:avLst/>
+          </a:prstGeom>
+        </p:spPr>
+      </p:pic>
+      <p:sp>
+        <p:nvSpPr>
+          <p:cNvPr id="6" name="Text 3"/>
+          <p:cNvSpPr txBox="1"/>
+          <p:nvPr/>
+        </p:nvSpPr>
+        <p:spPr>
+          <a:xfrm>
+            <a:off x="1371600" y="1280160"/>
+            <a:ext cx="1554480" cy="960120"/>
+          </a:xfrm>
+          <a:prstGeom prst="rect">
+            <a:avLst/>
+          </a:prstGeom>
+          <a:noFill/>
+          <a:ln/>
+        </p:spPr>
+        <p:txBody>
+          <a:bodyPr wrap="square" lIns="0" tIns="0" rIns="0" bIns="0" rtlCol="0" anchor="ctr"/>
+          <a:lstStyle/>
+          <a:p>
+            <a:pPr indent="0" marL="0">
+              <a:buNone/>
+            </a:pPr>
+            <a:r>
+              <a:rPr lang="en-US" sz="1600" b="1" dirty="0">
+                <a:solidFill>
+                  <a:schemeClr val="tx2"/>
+                </a:solidFill>
+              </a:rPr>
+              <a:t>Licensing</a:t>
+            </a:r>
+            <a:endParaRPr lang="en-US" sz="1600" dirty="0"/>
+          </a:p>
+        </p:txBody>
+      </p:sp>
+      <p:sp>
+        <p:nvSpPr>
+          <p:cNvPr id="7" name="Text 4"/>
+          <p:cNvSpPr txBox="1"/>
+          <p:nvPr/>
+        </p:nvSpPr>
+        <p:spPr>
+          <a:xfrm>
+            <a:off x="2926080" y="1280160"/>
+            <a:ext cx="5577840" cy="960120"/>
+          </a:xfrm>
+          <a:prstGeom prst="rect">
+            <a:avLst/>
+          </a:prstGeom>
+          <a:noFill/>
+          <a:ln/>
+        </p:spPr>
+        <p:txBody>
+          <a:bodyPr wrap="square" lIns="0" tIns="0" rIns="0" bIns="0" rtlCol="0" anchor="ctr"/>
+          <a:lstStyle/>
+          <a:p>
+            <a:pPr indent="0" marL="0">
+              <a:buNone/>
+            </a:pPr>
+            <a:r>
+              <a:rPr lang="en-US" sz="1300" dirty="0">
+                <a:solidFill>
+                  <a:schemeClr val="tx1"/>
+                </a:solidFill>
+              </a:rPr>
+              <a:t>Agent 365 is licensed per user. Microsoft docs say it became generally available for the commercial segment on 1 May 2026 (earlier access was through the Frontier preview). Confirm current SKU and pricing with our Microsoft partner.</a:t>
+            </a:r>
+            <a:endParaRPr lang="en-US" sz="1300" dirty="0"/>
+          </a:p>
+        </p:txBody>
+      </p:sp>
+      <p:sp>
+        <p:nvSpPr>
+          <p:cNvPr id="8" name="Prereq row 2"/>
+          <p:cNvSpPr/>
+          <p:nvPr/>
+        </p:nvSpPr>
+        <p:spPr>
+          <a:xfrm>
+            <a:off x="457200" y="2395728"/>
+            <a:ext cx="8229600" cy="960120"/>
+          </a:xfrm>
+          <a:prstGeom prst="roundRect">
+            <a:avLst>
+              <a:gd name="adj" fmla="val 9524"/>
+            </a:avLst>
+          </a:prstGeom>
+          <a:solidFill>
+            <a:schemeClr val="bg2"/>
+          </a:solidFill>
+          <a:ln/>
+        </p:spPr>
+      </p:sp>
+      <p:sp>
+        <p:nvSpPr>
+          <p:cNvPr id="9" name="Prereq icon bg 2"/>
+          <p:cNvSpPr/>
+          <p:nvPr/>
+        </p:nvSpPr>
+        <p:spPr>
+          <a:xfrm>
+            <a:off x="658368" y="2624328"/>
+            <a:ext cx="502920" cy="502920"/>
+          </a:xfrm>
+          <a:prstGeom prst="ellipse">
+            <a:avLst/>
+          </a:prstGeom>
+          <a:solidFill>
+            <a:schemeClr val="accent3"/>
+          </a:solidFill>
+          <a:ln/>
+        </p:spPr>
+      </p:sp>
+      <p:pic>
+        <p:nvPicPr>
+          <p:cNvPr id="10" name="Image 1" descr="Admin roles">    </p:cNvPr>
+          <p:cNvPicPr>
+            <a:picLocks noChangeAspect="1"/>
+          </p:cNvPicPr>
+          <p:nvPr/>
+        </p:nvPicPr>
+        <p:blipFill>
+          <a:blip r:embed="rId2"/>
+          <a:stretch>
+            <a:fillRect/>
+          </a:stretch>
+        </p:blipFill>
+        <p:spPr>
+          <a:xfrm>
+            <a:off x="768096" y="2734056"/>
+            <a:ext cx="283464" cy="283464"/>
+          </a:xfrm>
+          <a:prstGeom prst="rect">
+            <a:avLst/>
+          </a:prstGeom>
+        </p:spPr>
+      </p:pic>
+      <p:sp>
+        <p:nvSpPr>
+          <p:cNvPr id="11" name="Text 7"/>
+          <p:cNvSpPr txBox="1"/>
+          <p:nvPr/>
+        </p:nvSpPr>
+        <p:spPr>
+          <a:xfrm>
+            <a:off x="1371600" y="2395728"/>
+            <a:ext cx="1554480" cy="960120"/>
+          </a:xfrm>
+          <a:prstGeom prst="rect">
+            <a:avLst/>
+          </a:prstGeom>
+          <a:noFill/>
+          <a:ln/>
+        </p:spPr>
+        <p:txBody>
+          <a:bodyPr wrap="square" lIns="0" tIns="0" rIns="0" bIns="0" rtlCol="0" anchor="ctr"/>
+          <a:lstStyle/>
+          <a:p>
+            <a:pPr indent="0" marL="0">
+              <a:buNone/>
+            </a:pPr>
+            <a:r>
+              <a:rPr lang="en-US" sz="1600" b="1" dirty="0">
+                <a:solidFill>
+                  <a:schemeClr val="tx2"/>
+                </a:solidFill>
+              </a:rPr>
+              <a:t>Admin roles</a:t>
+            </a:r>
+            <a:endParaRPr lang="en-US" sz="1600" dirty="0"/>
+          </a:p>
+        </p:txBody>
+      </p:sp>
+      <p:sp>
+        <p:nvSpPr>
+          <p:cNvPr id="12" name="Text 8"/>
+          <p:cNvSpPr txBox="1"/>
+          <p:nvPr/>
+        </p:nvSpPr>
+        <p:spPr>
+          <a:xfrm>
+            <a:off x="2926080" y="2395728"/>
+            <a:ext cx="5577840" cy="960120"/>
+          </a:xfrm>
+          <a:prstGeom prst="rect">
+            <a:avLst/>
+          </a:prstGeom>
+          <a:noFill/>
+          <a:ln/>
+        </p:spPr>
+        <p:txBody>
+          <a:bodyPr wrap="square" lIns="0" tIns="0" rIns="0" bIns="0" rtlCol="0" anchor="ctr"/>
+          <a:lstStyle/>
+          <a:p>
+            <a:pPr indent="0" marL="0">
+              <a:buNone/>
+            </a:pPr>
+            <a:r>
+              <a:rPr lang="en-US" sz="1300" dirty="0">
+                <a:solidFill>
+                  <a:schemeClr val="tx1"/>
+                </a:solidFill>
+              </a:rPr>
+              <a:t>Global Administrator or AI Administrator to manage Agent 365 in the admin center; Entra, Purview and Defender roles for their parts.</a:t>
+            </a:r>
+            <a:endParaRPr lang="en-US" sz="1300" dirty="0"/>
+          </a:p>
+        </p:txBody>
+      </p:sp>
+      <p:sp>
+        <p:nvSpPr>
+          <p:cNvPr id="13" name="Prereq row 3"/>
+          <p:cNvSpPr/>
+          <p:nvPr/>
+        </p:nvSpPr>
+        <p:spPr>
+          <a:xfrm>
+            <a:off x="457200" y="3511296"/>
+            <a:ext cx="8229600" cy="960120"/>
+          </a:xfrm>
+          <a:prstGeom prst="roundRect">
+            <a:avLst>
+              <a:gd name="adj" fmla="val 9524"/>
+            </a:avLst>
+          </a:prstGeom>
+          <a:solidFill>
+            <a:schemeClr val="bg2"/>
+          </a:solidFill>
+          <a:ln/>
+        </p:spPr>
+      </p:sp>
+      <p:sp>
+        <p:nvSpPr>
+          <p:cNvPr id="14" name="Prereq icon bg 3"/>
+          <p:cNvSpPr/>
+          <p:nvPr/>
+        </p:nvSpPr>
+        <p:spPr>
+          <a:xfrm>
+            <a:off x="658368" y="3739896"/>
+            <a:ext cx="502920" cy="502920"/>
+          </a:xfrm>
+          <a:prstGeom prst="ellipse">
+            <a:avLst/>
+          </a:prstGeom>
+          <a:solidFill>
+            <a:schemeClr val="accent3"/>
+          </a:solidFill>
+          <a:ln/>
+        </p:spPr>
+      </p:sp>
+      <p:pic>
+        <p:nvPicPr>
+          <p:cNvPr id="15" name="Image 2" descr="Watch-outs">    </p:cNvPr>
+          <p:cNvPicPr>
+            <a:picLocks noChangeAspect="1"/>
+          </p:cNvPicPr>
+          <p:nvPr/>
+        </p:nvPicPr>
+        <p:blipFill>
+          <a:blip r:embed="rId3"/>
+          <a:stretch>
+            <a:fillRect/>
+          </a:stretch>
+        </p:blipFill>
+        <p:spPr>
+          <a:xfrm>
+            <a:off x="768096" y="3849624"/>
+            <a:ext cx="283464" cy="283464"/>
+          </a:xfrm>
+          <a:prstGeom prst="rect">
+            <a:avLst/>
+          </a:prstGeom>
+        </p:spPr>
+      </p:pic>
+      <p:sp>
+        <p:nvSpPr>
+          <p:cNvPr id="16" name="Text 11"/>
+          <p:cNvSpPr txBox="1"/>
+          <p:nvPr/>
+        </p:nvSpPr>
+        <p:spPr>
+          <a:xfrm>
+            <a:off x="1371600" y="3511296"/>
+            <a:ext cx="1554480" cy="960120"/>
+          </a:xfrm>
+          <a:prstGeom prst="rect">
+            <a:avLst/>
+          </a:prstGeom>
+          <a:noFill/>
+          <a:ln/>
+        </p:spPr>
+        <p:txBody>
+          <a:bodyPr wrap="square" lIns="0" tIns="0" rIns="0" bIns="0" rtlCol="0" anchor="ctr"/>
+          <a:lstStyle/>
+          <a:p>
+            <a:pPr indent="0" marL="0">
+              <a:buNone/>
+            </a:pPr>
+            <a:r>
+              <a:rPr lang="en-US" sz="1600" b="1" dirty="0">
+                <a:solidFill>
+                  <a:schemeClr val="tx2"/>
+                </a:solidFill>
+              </a:rPr>
+              <a:t>Watch-outs</a:t>
+            </a:r>
+            <a:endParaRPr lang="en-US" sz="1600" dirty="0"/>
+          </a:p>
+        </p:txBody>
+      </p:sp>
+      <p:sp>
+        <p:nvSpPr>
+          <p:cNvPr id="17" name="Text 12"/>
+          <p:cNvSpPr txBox="1"/>
+          <p:nvPr/>
+        </p:nvSpPr>
+        <p:spPr>
+          <a:xfrm>
+            <a:off x="2926080" y="3511296"/>
+            <a:ext cx="5577840" cy="960120"/>
+          </a:xfrm>
+          <a:prstGeom prst="rect">
+            <a:avLst/>
+          </a:prstGeom>
+          <a:noFill/>
+          <a:ln/>
+        </p:spPr>
+        <p:txBody>
+          <a:bodyPr wrap="square" lIns="0" tIns="0" rIns="0" bIns="0" rtlCol="0" anchor="ctr"/>
+          <a:lstStyle/>
+          <a:p>
+            <a:pPr indent="0" marL="0">
+              <a:buNone/>
+            </a:pPr>
+            <a:r>
+              <a:rPr lang="en-US" sz="1300" dirty="0">
+                <a:solidFill>
+                  <a:schemeClr val="tx1"/>
+                </a:solidFill>
+              </a:rPr>
+              <a:t>The old Entra agent registry and its API were retired in 2026. Re-register any custom agents with the new Agent 365 registration Graph API.</a:t>
+            </a:r>
+            <a:endParaRPr lang="en-US" sz="1300" dirty="0"/>
+          </a:p>
+        </p:txBody>
+      </p:sp>
+      <p:sp>
+        <p:nvSpPr>
+          <p:cNvPr id="25" name="Slide Number Placeholder 0"/>
+          <p:cNvSpPr>
+            <a:spLocks noGrp="1"/>
+          </p:cNvSpPr>
+          <p:nvPr>
+            <p:ph type="sldNum" sz="quarter" idx="4294967295"/>
+          </p:nvPr>
+        </p:nvSpPr>
+        <p:spPr>
+          <a:xfrm>
+            <a:off x="8229600" y="4773168"/>
+            <a:ext cx="457200" cy="228600"/>
+          </a:xfrm>
+          <a:prstGeom prst="rect">
+            <a:avLst/>
+          </a:prstGeom>
+          <a:extLst>
+            <a:ext uri="{C572A759-6A51-4108-AA02-DFA0A04FC94B}">
+              <ma14:wrappingTextBoxFlag xmlns:ma14="http://schemas.microsoft.com/office/mac/drawingml/2011/main" val="0"/>
+            </a:ext>
+          </a:extLst>
+        </p:spPr>
+        <p:txBody>
+          <a:bodyPr/>
+          <a:lstStyle>
+            <a:lvl1pPr>
+              <a:defRPr sz="900">
+                <a:solidFill>
+                  <a:schemeClr val="accent6"/>
+                </a:solidFill>
+              </a:defRPr>
+            </a:lvl1pPr>
+          </a:lstStyle>
+          <a:p>
+            <a:pPr algn="r"/>
+            <a:fld id="{F7021451-1387-4CA6-816F-3879F97B5CBC}" type="slidenum">
+              <a:rPr b="0" lang="en-US"/>
+              <a:t>17</a:t>
+            </a:fld>
+            <a:endParaRPr lang="en-US"/>
+          </a:p>
+        </p:txBody>
+      </p:sp>
+    </p:spTree>
+  </p:cSld>
+  <p:clrMapOvr>
+    <a:masterClrMapping/>
+  </p:clrMapOvr>
+</p:sld>
+</file>
+
+<file path=ppt/slides/slide18.xml><?xml version="1.0" encoding="utf-8"?>
+<p:sld xmlns:a="http://schemas.openxmlformats.org/drawingml/2006/main" xmlns:r="http://schemas.openxmlformats.org/officeDocument/2006/relationships" xmlns:p="http://schemas.openxmlformats.org/presentationml/2006/main">
+  <p:cSld name="Slide 18">
+    <p:spTree>
+      <p:nvGrpSpPr>
+        <p:cNvPr id="1" name=""/>
+        <p:cNvGrpSpPr/>
+        <p:nvPr/>
+      </p:nvGrpSpPr>
+      <p:grpSpPr>
+        <a:xfrm>
+          <a:off x="0" y="0"/>
+          <a:ext cx="0" cy="0"/>
+          <a:chOff x="0" y="0"/>
+          <a:chExt cx="0" cy="0"/>
+        </a:xfrm>
+      </p:grpSpPr>
+      <p:sp>
+        <p:nvSpPr>
+          <p:cNvPr id="2" name="Text 0"/>
+          <p:cNvSpPr/>
+          <p:nvPr>
+            <p:ph idx="100" type="title" hasCustomPrompt="1"/>
+          </p:nvPr>
+        </p:nvSpPr>
+        <p:spPr>
+          <a:xfrm>
+            <a:off x="457200" y="502920"/>
+            <a:ext cx="8229600" cy="594360"/>
+          </a:xfrm>
+          <a:prstGeom prst="rect">
+            <a:avLst/>
+          </a:prstGeom>
+          <a:noFill/>
+          <a:ln/>
+        </p:spPr>
+        <p:txBody>
+          <a:bodyPr wrap="square" lIns="0" tIns="0" rIns="0" bIns="0" rtlCol="0" anchor="ctr"/>
+          <a:lstStyle/>
+          <a:p>
+            <a:pPr algn="l" indent="0" marL="0">
+              <a:buNone/>
+            </a:pPr>
+            <a:r>
+              <a:rPr lang="en-US" sz="2800" b="1" dirty="0">
+                <a:solidFill>
+                  <a:schemeClr val="tx2"/>
+                </a:solidFill>
+              </a:rPr>
+              <a:t>Our roadmap: from visibility to value</a:t>
+            </a:r>
+            <a:endParaRPr lang="en-US" sz="2800" dirty="0"/>
+          </a:p>
+        </p:txBody>
+      </p:sp>
+      <p:sp>
+        <p:nvSpPr>
+          <p:cNvPr id="3" name="Phase 1"/>
+          <p:cNvSpPr/>
+          <p:nvPr/>
+        </p:nvSpPr>
+        <p:spPr>
+          <a:xfrm>
+            <a:off x="457200" y="1325880"/>
+            <a:ext cx="1920240" cy="3200400"/>
+          </a:xfrm>
+          <a:prstGeom prst="roundRect">
+            <a:avLst>
+              <a:gd name="adj" fmla="val 5714"/>
+            </a:avLst>
+          </a:prstGeom>
+          <a:solidFill>
+            <a:schemeClr val="bg2"/>
+          </a:solidFill>
+          <a:ln/>
+        </p:spPr>
+      </p:sp>
+      <p:sp>
+        <p:nvSpPr>
+          <p:cNvPr id="4" name="Phase 1 badge"/>
+          <p:cNvSpPr/>
+          <p:nvPr/>
+        </p:nvSpPr>
+        <p:spPr>
+          <a:xfrm>
+            <a:off x="640080" y="1508760"/>
+            <a:ext cx="548640" cy="548640"/>
+          </a:xfrm>
+          <a:prstGeom prst="ellipse">
+            <a:avLst/>
+          </a:prstGeom>
+          <a:solidFill>
+            <a:schemeClr val="accent1"/>
+          </a:solidFill>
+          <a:ln/>
+        </p:spPr>
+      </p:sp>
+      <p:sp>
+        <p:nvSpPr>
+          <p:cNvPr id="5" name="Text 3"/>
+          <p:cNvSpPr txBox="1"/>
+          <p:nvPr/>
+        </p:nvSpPr>
+        <p:spPr>
+          <a:xfrm>
+            <a:off x="640080" y="1508760"/>
+            <a:ext cx="548640" cy="548640"/>
+          </a:xfrm>
+          <a:prstGeom prst="rect">
+            <a:avLst/>
+          </a:prstGeom>
+          <a:noFill/>
+          <a:ln/>
+        </p:spPr>
+        <p:txBody>
+          <a:bodyPr wrap="square" lIns="0" tIns="0" rIns="0" bIns="0" rtlCol="0" anchor="ctr"/>
+          <a:lstStyle/>
+          <a:p>
+            <a:pPr algn="ctr" indent="0" marL="0">
+              <a:buNone/>
+            </a:pPr>
+            <a:r>
+              <a:rPr lang="en-US" sz="2000" b="1" dirty="0">
+                <a:solidFill>
+                  <a:schemeClr val="bg1"/>
+                </a:solidFill>
+              </a:rPr>
+              <a:t>1</a:t>
+            </a:r>
+            <a:endParaRPr lang="en-US" sz="2000" dirty="0"/>
+          </a:p>
+        </p:txBody>
+      </p:sp>
+      <p:sp>
+        <p:nvSpPr>
+          <p:cNvPr id="6" name="Text 4"/>
+          <p:cNvSpPr txBox="1"/>
+          <p:nvPr/>
+        </p:nvSpPr>
+        <p:spPr>
+          <a:xfrm>
+            <a:off x="640080" y="2194560"/>
+            <a:ext cx="1645920" cy="365760"/>
+          </a:xfrm>
+          <a:prstGeom prst="rect">
+            <a:avLst/>
+          </a:prstGeom>
+          <a:noFill/>
+          <a:ln/>
+        </p:spPr>
+        <p:txBody>
+          <a:bodyPr wrap="square" lIns="0" tIns="0" rIns="0" bIns="0" rtlCol="0" anchor="ctr"/>
+          <a:lstStyle/>
+          <a:p>
+            <a:pPr indent="0" marL="0">
+              <a:buNone/>
+            </a:pPr>
+            <a:r>
+              <a:rPr lang="en-US" sz="1800" b="1" dirty="0">
+                <a:solidFill>
+                  <a:schemeClr val="tx2"/>
+                </a:solidFill>
+              </a:rPr>
+              <a:t>Discover</a:t>
+            </a:r>
+            <a:endParaRPr lang="en-US" sz="1800" dirty="0"/>
+          </a:p>
+        </p:txBody>
+      </p:sp>
+      <p:sp>
+        <p:nvSpPr>
+          <p:cNvPr id="7" name="Text 5"/>
+          <p:cNvSpPr txBox="1"/>
+          <p:nvPr/>
+        </p:nvSpPr>
+        <p:spPr>
+          <a:xfrm>
+            <a:off x="640080" y="2651760"/>
+            <a:ext cx="1645920" cy="1737360"/>
+          </a:xfrm>
+          <a:prstGeom prst="rect">
+            <a:avLst/>
+          </a:prstGeom>
+          <a:noFill/>
+          <a:ln/>
+        </p:spPr>
+        <p:txBody>
+          <a:bodyPr wrap="square" lIns="0" tIns="0" rIns="0" bIns="0" rtlCol="0" anchor="t"/>
+          <a:lstStyle/>
+          <a:p>
+            <a:pPr marL="342900" indent="-342900">
+              <a:spcAft>
+                <a:spcPts val="600"/>
+              </a:spcAft>
+              <a:buSzPct val="100000"/>
+              <a:buChar char="•"/>
+            </a:pPr>
+            <a:r>
+              <a:rPr lang="en-US" sz="1200" dirty="0">
+                <a:solidFill>
+                  <a:schemeClr val="tx1"/>
+                </a:solidFill>
+              </a:rPr>
+              <a:t>Review the Overview dashboard</a:t>
+            </a:r>
+            <a:endParaRPr lang="en-US" sz="1200" dirty="0"/>
+          </a:p>
+          <a:p>
+            <a:pPr marL="342900" indent="-342900">
+              <a:spcAft>
+                <a:spcPts val="600"/>
+              </a:spcAft>
+              <a:buSzPct val="100000"/>
+              <a:buChar char="•"/>
+            </a:pPr>
+            <a:r>
+              <a:rPr lang="en-US" sz="1200" dirty="0">
+                <a:solidFill>
+                  <a:schemeClr val="tx1"/>
+                </a:solidFill>
+              </a:rPr>
+              <a:t>Inventory agents in the registry</a:t>
+            </a:r>
+            <a:endParaRPr lang="en-US" sz="1200" dirty="0"/>
+          </a:p>
+          <a:p>
+            <a:pPr marL="342900" indent="-342900">
+              <a:spcAft>
+                <a:spcPts val="600"/>
+              </a:spcAft>
+              <a:buSzPct val="100000"/>
+              <a:buChar char="•"/>
+            </a:pPr>
+            <a:r>
+              <a:rPr lang="en-US" sz="1200" dirty="0">
+                <a:solidFill>
+                  <a:schemeClr val="tx1"/>
+                </a:solidFill>
+              </a:rPr>
+              <a:t>Explore the Agent Map</a:t>
+            </a:r>
+            <a:endParaRPr lang="en-US" sz="1200" dirty="0"/>
+          </a:p>
+        </p:txBody>
+      </p:sp>
+      <p:sp>
+        <p:nvSpPr>
+          <p:cNvPr id="8" name="Arrow 1"/>
+          <p:cNvSpPr/>
+          <p:nvPr/>
+        </p:nvSpPr>
+        <p:spPr>
+          <a:xfrm>
+            <a:off x="2395728" y="1645920"/>
+            <a:ext cx="146304" cy="274320"/>
+          </a:xfrm>
+          <a:prstGeom prst="chevron">
+            <a:avLst/>
+          </a:prstGeom>
+          <a:solidFill>
+            <a:schemeClr val="accent6"/>
+          </a:solidFill>
+          <a:ln/>
+        </p:spPr>
+      </p:sp>
+      <p:sp>
+        <p:nvSpPr>
+          <p:cNvPr id="9" name="Phase 2"/>
+          <p:cNvSpPr/>
+          <p:nvPr/>
+        </p:nvSpPr>
+        <p:spPr>
+          <a:xfrm>
+            <a:off x="2560320" y="1325880"/>
+            <a:ext cx="1920240" cy="3200400"/>
+          </a:xfrm>
+          <a:prstGeom prst="roundRect">
+            <a:avLst>
+              <a:gd name="adj" fmla="val 5714"/>
+            </a:avLst>
+          </a:prstGeom>
+          <a:solidFill>
+            <a:schemeClr val="bg2"/>
+          </a:solidFill>
+          <a:ln/>
+        </p:spPr>
+      </p:sp>
+      <p:sp>
+        <p:nvSpPr>
+          <p:cNvPr id="10" name="Phase 2 badge"/>
+          <p:cNvSpPr/>
+          <p:nvPr/>
+        </p:nvSpPr>
+        <p:spPr>
+          <a:xfrm>
+            <a:off x="2743200" y="1508760"/>
+            <a:ext cx="548640" cy="548640"/>
+          </a:xfrm>
+          <a:prstGeom prst="ellipse">
+            <a:avLst/>
+          </a:prstGeom>
+          <a:solidFill>
+            <a:schemeClr val="accent5"/>
+          </a:solidFill>
+          <a:ln/>
+        </p:spPr>
+      </p:sp>
+      <p:sp>
+        <p:nvSpPr>
+          <p:cNvPr id="11" name="Text 9"/>
+          <p:cNvSpPr txBox="1"/>
+          <p:nvPr/>
+        </p:nvSpPr>
+        <p:spPr>
+          <a:xfrm>
+            <a:off x="2743200" y="1508760"/>
+            <a:ext cx="548640" cy="548640"/>
+          </a:xfrm>
+          <a:prstGeom prst="rect">
+            <a:avLst/>
+          </a:prstGeom>
+          <a:noFill/>
+          <a:ln/>
+        </p:spPr>
+        <p:txBody>
+          <a:bodyPr wrap="square" lIns="0" tIns="0" rIns="0" bIns="0" rtlCol="0" anchor="ctr"/>
+          <a:lstStyle/>
+          <a:p>
+            <a:pPr algn="ctr" indent="0" marL="0">
+              <a:buNone/>
+            </a:pPr>
+            <a:r>
+              <a:rPr lang="en-US" sz="2000" b="1" dirty="0">
+                <a:solidFill>
+                  <a:schemeClr val="bg1"/>
+                </a:solidFill>
+              </a:rPr>
+              <a:t>2</a:t>
+            </a:r>
+            <a:endParaRPr lang="en-US" sz="2000" dirty="0"/>
+          </a:p>
+        </p:txBody>
+      </p:sp>
+      <p:sp>
+        <p:nvSpPr>
+          <p:cNvPr id="12" name="Text 10"/>
+          <p:cNvSpPr txBox="1"/>
+          <p:nvPr/>
+        </p:nvSpPr>
+        <p:spPr>
+          <a:xfrm>
+            <a:off x="2743200" y="2194560"/>
+            <a:ext cx="1645920" cy="365760"/>
+          </a:xfrm>
+          <a:prstGeom prst="rect">
+            <a:avLst/>
+          </a:prstGeom>
+          <a:noFill/>
+          <a:ln/>
+        </p:spPr>
+        <p:txBody>
+          <a:bodyPr wrap="square" lIns="0" tIns="0" rIns="0" bIns="0" rtlCol="0" anchor="ctr"/>
+          <a:lstStyle/>
+          <a:p>
+            <a:pPr indent="0" marL="0">
+              <a:buNone/>
+            </a:pPr>
+            <a:r>
+              <a:rPr lang="en-US" sz="1800" b="1" dirty="0">
+                <a:solidFill>
+                  <a:schemeClr val="tx2"/>
+                </a:solidFill>
+              </a:rPr>
+              <a:t>Govern</a:t>
+            </a:r>
+            <a:endParaRPr lang="en-US" sz="1800" dirty="0"/>
+          </a:p>
+        </p:txBody>
+      </p:sp>
+      <p:sp>
+        <p:nvSpPr>
+          <p:cNvPr id="13" name="Text 11"/>
+          <p:cNvSpPr txBox="1"/>
+          <p:nvPr/>
+        </p:nvSpPr>
+        <p:spPr>
+          <a:xfrm>
+            <a:off x="2743200" y="2651760"/>
+            <a:ext cx="1645920" cy="1737360"/>
+          </a:xfrm>
+          <a:prstGeom prst="rect">
+            <a:avLst/>
+          </a:prstGeom>
+          <a:noFill/>
+          <a:ln/>
+        </p:spPr>
+        <p:txBody>
+          <a:bodyPr wrap="square" lIns="0" tIns="0" rIns="0" bIns="0" rtlCol="0" anchor="t"/>
+          <a:lstStyle/>
+          <a:p>
+            <a:pPr marL="342900" indent="-342900">
+              <a:spcAft>
+                <a:spcPts val="600"/>
+              </a:spcAft>
+              <a:buSzPct val="100000"/>
+              <a:buChar char="•"/>
+            </a:pPr>
+            <a:r>
+              <a:rPr lang="en-US" sz="1200" dirty="0">
+                <a:solidFill>
+                  <a:schemeClr val="tx1"/>
+                </a:solidFill>
+              </a:rPr>
+              <a:t>Assign owners to ownerless agents</a:t>
+            </a:r>
+            <a:endParaRPr lang="en-US" sz="1200" dirty="0"/>
+          </a:p>
+          <a:p>
+            <a:pPr marL="342900" indent="-342900">
+              <a:spcAft>
+                <a:spcPts val="600"/>
+              </a:spcAft>
+              <a:buSzPct val="100000"/>
+              <a:buChar char="•"/>
+            </a:pPr>
+            <a:r>
+              <a:rPr lang="en-US" sz="1200" dirty="0">
+                <a:solidFill>
+                  <a:schemeClr val="tx1"/>
+                </a:solidFill>
+              </a:rPr>
+              <a:t>Set the approve / publish process</a:t>
+            </a:r>
+            <a:endParaRPr lang="en-US" sz="1200" dirty="0"/>
+          </a:p>
+          <a:p>
+            <a:pPr marL="342900" indent="-342900">
+              <a:spcAft>
+                <a:spcPts val="600"/>
+              </a:spcAft>
+              <a:buSzPct val="100000"/>
+              <a:buChar char="•"/>
+            </a:pPr>
+            <a:r>
+              <a:rPr lang="en-US" sz="1200" dirty="0">
+                <a:solidFill>
+                  <a:schemeClr val="tx1"/>
+                </a:solidFill>
+              </a:rPr>
+              <a:t>Turn on Entra Agent ID controls</a:t>
+            </a:r>
+            <a:endParaRPr lang="en-US" sz="1200" dirty="0"/>
+          </a:p>
+        </p:txBody>
+      </p:sp>
+      <p:sp>
+        <p:nvSpPr>
+          <p:cNvPr id="14" name="Arrow 2"/>
+          <p:cNvSpPr/>
+          <p:nvPr/>
+        </p:nvSpPr>
+        <p:spPr>
+          <a:xfrm>
+            <a:off x="4498848" y="1645920"/>
+            <a:ext cx="146304" cy="274320"/>
+          </a:xfrm>
+          <a:prstGeom prst="chevron">
+            <a:avLst/>
+          </a:prstGeom>
+          <a:solidFill>
+            <a:schemeClr val="accent6"/>
+          </a:solidFill>
+          <a:ln/>
+        </p:spPr>
+      </p:sp>
+      <p:sp>
+        <p:nvSpPr>
+          <p:cNvPr id="15" name="Phase 3"/>
+          <p:cNvSpPr/>
+          <p:nvPr/>
+        </p:nvSpPr>
+        <p:spPr>
+          <a:xfrm>
+            <a:off x="4663440" y="1325880"/>
+            <a:ext cx="1920240" cy="3200400"/>
+          </a:xfrm>
+          <a:prstGeom prst="roundRect">
+            <a:avLst>
+              <a:gd name="adj" fmla="val 5714"/>
+            </a:avLst>
+          </a:prstGeom>
+          <a:solidFill>
+            <a:schemeClr val="bg2"/>
+          </a:solidFill>
+          <a:ln/>
+        </p:spPr>
+      </p:sp>
+      <p:sp>
+        <p:nvSpPr>
+          <p:cNvPr id="16" name="Phase 3 badge"/>
+          <p:cNvSpPr/>
+          <p:nvPr/>
+        </p:nvSpPr>
+        <p:spPr>
+          <a:xfrm>
+            <a:off x="4846320" y="1508760"/>
+            <a:ext cx="548640" cy="548640"/>
+          </a:xfrm>
+          <a:prstGeom prst="ellipse">
+            <a:avLst/>
+          </a:prstGeom>
+          <a:solidFill>
+            <a:schemeClr val="accent4"/>
+          </a:solidFill>
+          <a:ln/>
+        </p:spPr>
+      </p:sp>
+      <p:sp>
+        <p:nvSpPr>
+          <p:cNvPr id="17" name="Text 15"/>
+          <p:cNvSpPr txBox="1"/>
+          <p:nvPr/>
+        </p:nvSpPr>
+        <p:spPr>
+          <a:xfrm>
+            <a:off x="4846320" y="1508760"/>
+            <a:ext cx="548640" cy="548640"/>
+          </a:xfrm>
+          <a:prstGeom prst="rect">
+            <a:avLst/>
+          </a:prstGeom>
+          <a:noFill/>
+          <a:ln/>
+        </p:spPr>
+        <p:txBody>
+          <a:bodyPr wrap="square" lIns="0" tIns="0" rIns="0" bIns="0" rtlCol="0" anchor="ctr"/>
+          <a:lstStyle/>
+          <a:p>
+            <a:pPr algn="ctr" indent="0" marL="0">
+              <a:buNone/>
+            </a:pPr>
+            <a:r>
+              <a:rPr lang="en-US" sz="2000" b="1" dirty="0">
+                <a:solidFill>
+                  <a:schemeClr val="bg1"/>
+                </a:solidFill>
+              </a:rPr>
+              <a:t>3</a:t>
+            </a:r>
+            <a:endParaRPr lang="en-US" sz="2000" dirty="0"/>
+          </a:p>
+        </p:txBody>
+      </p:sp>
+      <p:sp>
+        <p:nvSpPr>
+          <p:cNvPr id="18" name="Text 16"/>
+          <p:cNvSpPr txBox="1"/>
+          <p:nvPr/>
+        </p:nvSpPr>
+        <p:spPr>
+          <a:xfrm>
+            <a:off x="4846320" y="2194560"/>
+            <a:ext cx="1645920" cy="365760"/>
+          </a:xfrm>
+          <a:prstGeom prst="rect">
+            <a:avLst/>
+          </a:prstGeom>
+          <a:noFill/>
+          <a:ln/>
+        </p:spPr>
+        <p:txBody>
+          <a:bodyPr wrap="square" lIns="0" tIns="0" rIns="0" bIns="0" rtlCol="0" anchor="ctr"/>
+          <a:lstStyle/>
+          <a:p>
+            <a:pPr indent="0" marL="0">
+              <a:buNone/>
+            </a:pPr>
+            <a:r>
+              <a:rPr lang="en-US" sz="1800" b="1" dirty="0">
+                <a:solidFill>
+                  <a:schemeClr val="tx2"/>
+                </a:solidFill>
+              </a:rPr>
+              <a:t>Protect</a:t>
+            </a:r>
+            <a:endParaRPr lang="en-US" sz="1800" dirty="0"/>
+          </a:p>
+        </p:txBody>
+      </p:sp>
+      <p:sp>
+        <p:nvSpPr>
+          <p:cNvPr id="19" name="Text 17"/>
+          <p:cNvSpPr txBox="1"/>
+          <p:nvPr/>
+        </p:nvSpPr>
+        <p:spPr>
+          <a:xfrm>
+            <a:off x="4846320" y="2651760"/>
+            <a:ext cx="1645920" cy="1737360"/>
+          </a:xfrm>
+          <a:prstGeom prst="rect">
+            <a:avLst/>
+          </a:prstGeom>
+          <a:noFill/>
+          <a:ln/>
+        </p:spPr>
+        <p:txBody>
+          <a:bodyPr wrap="square" lIns="0" tIns="0" rIns="0" bIns="0" rtlCol="0" anchor="t"/>
+          <a:lstStyle/>
+          <a:p>
+            <a:pPr marL="342900" indent="-342900">
+              <a:spcAft>
+                <a:spcPts val="600"/>
+              </a:spcAft>
+              <a:buSzPct val="100000"/>
+              <a:buChar char="•"/>
+            </a:pPr>
+            <a:r>
+              <a:rPr lang="en-US" sz="1200" dirty="0">
+                <a:solidFill>
+                  <a:schemeClr val="tx1"/>
+                </a:solidFill>
+              </a:rPr>
+              <a:t>Extend Purview labels, DLP and audit</a:t>
+            </a:r>
+            <a:endParaRPr lang="en-US" sz="1200" dirty="0"/>
+          </a:p>
+          <a:p>
+            <a:pPr marL="342900" indent="-342900">
+              <a:spcAft>
+                <a:spcPts val="600"/>
+              </a:spcAft>
+              <a:buSzPct val="100000"/>
+              <a:buChar char="•"/>
+            </a:pPr>
+            <a:r>
+              <a:rPr lang="en-US" sz="1200" dirty="0">
+                <a:solidFill>
+                  <a:schemeClr val="tx1"/>
+                </a:solidFill>
+              </a:rPr>
+              <a:t>Enable Defender for agents</a:t>
+            </a:r>
+            <a:endParaRPr lang="en-US" sz="1200" dirty="0"/>
+          </a:p>
+          <a:p>
+            <a:pPr marL="342900" indent="-342900">
+              <a:spcAft>
+                <a:spcPts val="600"/>
+              </a:spcAft>
+              <a:buSzPct val="100000"/>
+              <a:buChar char="•"/>
+            </a:pPr>
+            <a:r>
+              <a:rPr lang="en-US" sz="1200" dirty="0">
+                <a:solidFill>
+                  <a:schemeClr val="tx1"/>
+                </a:solidFill>
+              </a:rPr>
+              <a:t>Add agents to SOC playbooks</a:t>
+            </a:r>
+            <a:endParaRPr lang="en-US" sz="1200" dirty="0"/>
+          </a:p>
+        </p:txBody>
+      </p:sp>
+      <p:sp>
+        <p:nvSpPr>
+          <p:cNvPr id="20" name="Arrow 3"/>
+          <p:cNvSpPr/>
+          <p:nvPr/>
+        </p:nvSpPr>
+        <p:spPr>
+          <a:xfrm>
+            <a:off x="6601968" y="1645920"/>
+            <a:ext cx="146304" cy="274320"/>
+          </a:xfrm>
+          <a:prstGeom prst="chevron">
+            <a:avLst/>
+          </a:prstGeom>
+          <a:solidFill>
+            <a:schemeClr val="accent6"/>
+          </a:solidFill>
+          <a:ln/>
+        </p:spPr>
+      </p:sp>
+      <p:sp>
+        <p:nvSpPr>
+          <p:cNvPr id="21" name="Phase 4"/>
+          <p:cNvSpPr/>
+          <p:nvPr/>
+        </p:nvSpPr>
+        <p:spPr>
+          <a:xfrm>
+            <a:off x="6766560" y="1325880"/>
+            <a:ext cx="1920240" cy="3200400"/>
+          </a:xfrm>
+          <a:prstGeom prst="roundRect">
+            <a:avLst>
+              <a:gd name="adj" fmla="val 5714"/>
+            </a:avLst>
+          </a:prstGeom>
+          <a:solidFill>
+            <a:schemeClr val="bg2"/>
+          </a:solidFill>
+          <a:ln/>
+        </p:spPr>
+      </p:sp>
+      <p:sp>
+        <p:nvSpPr>
+          <p:cNvPr id="22" name="Phase 4 badge"/>
+          <p:cNvSpPr/>
+          <p:nvPr/>
+        </p:nvSpPr>
+        <p:spPr>
+          <a:xfrm>
+            <a:off x="6949440" y="1508760"/>
+            <a:ext cx="548640" cy="548640"/>
+          </a:xfrm>
+          <a:prstGeom prst="ellipse">
+            <a:avLst/>
+          </a:prstGeom>
+          <a:solidFill>
+            <a:schemeClr val="accent2"/>
+          </a:solidFill>
+          <a:ln/>
+        </p:spPr>
+      </p:sp>
+      <p:sp>
+        <p:nvSpPr>
+          <p:cNvPr id="23" name="Text 21"/>
+          <p:cNvSpPr txBox="1"/>
+          <p:nvPr/>
+        </p:nvSpPr>
+        <p:spPr>
+          <a:xfrm>
+            <a:off x="6949440" y="1508760"/>
+            <a:ext cx="548640" cy="548640"/>
+          </a:xfrm>
+          <a:prstGeom prst="rect">
+            <a:avLst/>
+          </a:prstGeom>
+          <a:noFill/>
+          <a:ln/>
+        </p:spPr>
+        <p:txBody>
+          <a:bodyPr wrap="square" lIns="0" tIns="0" rIns="0" bIns="0" rtlCol="0" anchor="ctr"/>
+          <a:lstStyle/>
+          <a:p>
+            <a:pPr algn="ctr" indent="0" marL="0">
+              <a:buNone/>
+            </a:pPr>
+            <a:r>
+              <a:rPr lang="en-US" sz="2000" b="1" dirty="0">
+                <a:solidFill>
+                  <a:schemeClr val="bg1"/>
+                </a:solidFill>
+              </a:rPr>
+              <a:t>4</a:t>
+            </a:r>
+            <a:endParaRPr lang="en-US" sz="2000" dirty="0"/>
+          </a:p>
+        </p:txBody>
+      </p:sp>
+      <p:sp>
+        <p:nvSpPr>
+          <p:cNvPr id="24" name="Text 22"/>
+          <p:cNvSpPr txBox="1"/>
+          <p:nvPr/>
+        </p:nvSpPr>
+        <p:spPr>
+          <a:xfrm>
+            <a:off x="6949440" y="2194560"/>
+            <a:ext cx="1645920" cy="365760"/>
+          </a:xfrm>
+          <a:prstGeom prst="rect">
+            <a:avLst/>
+          </a:prstGeom>
+          <a:noFill/>
+          <a:ln/>
+        </p:spPr>
+        <p:txBody>
+          <a:bodyPr wrap="square" lIns="0" tIns="0" rIns="0" bIns="0" rtlCol="0" anchor="ctr"/>
+          <a:lstStyle/>
+          <a:p>
+            <a:pPr indent="0" marL="0">
+              <a:buNone/>
+            </a:pPr>
+            <a:r>
+              <a:rPr lang="en-US" sz="1800" b="1" dirty="0">
+                <a:solidFill>
+                  <a:schemeClr val="tx2"/>
+                </a:solidFill>
+              </a:rPr>
+              <a:t>Optimise</a:t>
+            </a:r>
+            <a:endParaRPr lang="en-US" sz="1800" dirty="0"/>
+          </a:p>
+        </p:txBody>
+      </p:sp>
+      <p:sp>
+        <p:nvSpPr>
+          <p:cNvPr id="25" name="Text 23"/>
+          <p:cNvSpPr txBox="1"/>
+          <p:nvPr/>
+        </p:nvSpPr>
+        <p:spPr>
+          <a:xfrm>
+            <a:off x="6949440" y="2651760"/>
+            <a:ext cx="1645920" cy="1737360"/>
+          </a:xfrm>
+          <a:prstGeom prst="rect">
+            <a:avLst/>
+          </a:prstGeom>
+          <a:noFill/>
+          <a:ln/>
+        </p:spPr>
+        <p:txBody>
+          <a:bodyPr wrap="square" lIns="0" tIns="0" rIns="0" bIns="0" rtlCol="0" anchor="t"/>
+          <a:lstStyle/>
+          <a:p>
+            <a:pPr marL="342900" indent="-342900">
+              <a:spcAft>
+                <a:spcPts val="600"/>
+              </a:spcAft>
+              <a:buSzPct val="100000"/>
+              <a:buChar char="•"/>
+            </a:pPr>
+            <a:r>
+              <a:rPr lang="en-US" sz="1200" dirty="0">
+                <a:solidFill>
+                  <a:schemeClr val="tx1"/>
+                </a:solidFill>
+              </a:rPr>
+              <a:t>Track usage and errors</a:t>
+            </a:r>
+            <a:endParaRPr lang="en-US" sz="1200" dirty="0"/>
+          </a:p>
+          <a:p>
+            <a:pPr marL="342900" indent="-342900">
+              <a:spcAft>
+                <a:spcPts val="600"/>
+              </a:spcAft>
+              <a:buSzPct val="100000"/>
+              <a:buChar char="•"/>
+            </a:pPr>
+            <a:r>
+              <a:rPr lang="en-US" sz="1200" dirty="0">
+                <a:solidFill>
+                  <a:schemeClr val="tx1"/>
+                </a:solidFill>
+              </a:rPr>
+              <a:t>Retire unused agents</a:t>
+            </a:r>
+            <a:endParaRPr lang="en-US" sz="1200" dirty="0"/>
+          </a:p>
+          <a:p>
+            <a:pPr marL="342900" indent="-342900">
+              <a:spcAft>
+                <a:spcPts val="600"/>
+              </a:spcAft>
+              <a:buSzPct val="100000"/>
+              <a:buChar char="•"/>
+            </a:pPr>
+            <a:r>
+              <a:rPr lang="en-US" sz="1200" dirty="0">
+                <a:solidFill>
+                  <a:schemeClr val="tx1"/>
+                </a:solidFill>
+              </a:rPr>
+              <a:t>Build with the SDK and MCP tools</a:t>
+            </a:r>
+            <a:endParaRPr lang="en-US" sz="1200" dirty="0"/>
+          </a:p>
+        </p:txBody>
+      </p:sp>
+      <p:sp>
+        <p:nvSpPr>
+          <p:cNvPr id="25" name="Slide Number Placeholder 0"/>
+          <p:cNvSpPr>
+            <a:spLocks noGrp="1"/>
+          </p:cNvSpPr>
+          <p:nvPr>
+            <p:ph type="sldNum" sz="quarter" idx="4294967295"/>
+          </p:nvPr>
+        </p:nvSpPr>
+        <p:spPr>
+          <a:xfrm>
+            <a:off x="8229600" y="4773168"/>
+            <a:ext cx="457200" cy="228600"/>
+          </a:xfrm>
+          <a:prstGeom prst="rect">
+            <a:avLst/>
+          </a:prstGeom>
+          <a:extLst>
+            <a:ext uri="{C572A759-6A51-4108-AA02-DFA0A04FC94B}">
+              <ma14:wrappingTextBoxFlag xmlns:ma14="http://schemas.microsoft.com/office/mac/drawingml/2011/main" val="0"/>
+            </a:ext>
+          </a:extLst>
+        </p:spPr>
+        <p:txBody>
+          <a:bodyPr/>
+          <a:lstStyle>
+            <a:lvl1pPr>
+              <a:defRPr sz="900">
+                <a:solidFill>
+                  <a:schemeClr val="accent6"/>
+                </a:solidFill>
+              </a:defRPr>
+            </a:lvl1pPr>
+          </a:lstStyle>
+          <a:p>
+            <a:pPr algn="r"/>
+            <a:fld id="{F7021451-1387-4CA6-816F-3879F97B5CBC}" type="slidenum">
+              <a:rPr b="0" lang="en-US"/>
+              <a:t>18</a:t>
+            </a:fld>
+            <a:endParaRPr lang="en-US"/>
+          </a:p>
+        </p:txBody>
+      </p:sp>
+    </p:spTree>
+  </p:cSld>
+  <p:clrMapOvr>
+    <a:masterClrMapping/>
+  </p:clrMapOvr>
+</p:sld>
+</file>
+
+<file path=ppt/slides/slide19.xml><?xml version="1.0" encoding="utf-8"?>
+<p:sld xmlns:a="http://schemas.openxmlformats.org/drawingml/2006/main" xmlns:r="http://schemas.openxmlformats.org/officeDocument/2006/relationships" xmlns:p="http://schemas.openxmlformats.org/presentationml/2006/main">
+  <p:cSld name="Slide 19">
     <p:spTree>
       <p:nvGrpSpPr>
         <p:cNvPr id="1" name=""/>
